--- a/scripts/templates/folleto_template_clean.pptx
+++ b/scripts/templates/folleto_template_clean.pptx
@@ -116,7 +116,7 @@
 <file path=ppt/revisionInfo.xml><?xml version="1.0" encoding="utf-8"?>
 <p1510:revInfo xmlns:a="http://schemas.openxmlformats.org/drawingml/2006/main" xmlns:r="http://schemas.openxmlformats.org/officeDocument/2006/relationships" xmlns:p1510="http://schemas.microsoft.com/office/powerpoint/2015/10/main">
   <p1510:revLst>
-    <p1510:client id="{0D830610-BD1C-479C-91C4-B5887471694C}" v="9" dt="2026-04-17T13:17:30.168"/>
+    <p1510:client id="{6B86EE34-FED3-9153-BB57-FAE40BEF2E88}" v="1" dt="2026-03-03T20:18:10.944"/>
   </p1510:revLst>
 </p1510:revInfo>
 </file>
@@ -124,111 +124,24 @@
 <file path=ppt/changesInfos/changesInfo1.xml><?xml version="1.0" encoding="utf-8"?>
 <pc:chgInfo xmlns:a="http://schemas.openxmlformats.org/drawingml/2006/main" xmlns:r="http://schemas.openxmlformats.org/officeDocument/2006/relationships" xmlns:ac="http://schemas.microsoft.com/office/drawing/2013/main/command" xmlns:pc="http://schemas.microsoft.com/office/powerpoint/2013/main/command">
   <pc:docChgLst>
-    <pc:chgData name="María Isabel Velasco Retamal" userId="ea7c3d35-c8ba-4f00-aa41-aa3196d0b536" providerId="ADAL" clId="{39C33904-05A0-4AE7-AD80-C6D4EDA45C99}"/>
-    <pc:docChg chg="custSel modSld">
-      <pc:chgData name="María Isabel Velasco Retamal" userId="ea7c3d35-c8ba-4f00-aa41-aa3196d0b536" providerId="ADAL" clId="{39C33904-05A0-4AE7-AD80-C6D4EDA45C99}" dt="2026-04-17T13:17:36.305" v="19" actId="1076"/>
+    <pc:chgData name="Nicolas Cabezas" userId="S::nicolas.cabezas@vantrust.cl::858cceca-9205-4b14-b063-d9dbf783859e" providerId="AD" clId="Web-{6B86EE34-FED3-9153-BB57-FAE40BEF2E88}"/>
+    <pc:docChg chg="modSld">
+      <pc:chgData name="Nicolas Cabezas" userId="S::nicolas.cabezas@vantrust.cl::858cceca-9205-4b14-b063-d9dbf783859e" providerId="AD" clId="Web-{6B86EE34-FED3-9153-BB57-FAE40BEF2E88}" dt="2026-03-03T20:18:10.944" v="0"/>
       <pc:docMkLst>
         <pc:docMk/>
       </pc:docMkLst>
-      <pc:sldChg chg="delSp modSp mod">
-        <pc:chgData name="María Isabel Velasco Retamal" userId="ea7c3d35-c8ba-4f00-aa41-aa3196d0b536" providerId="ADAL" clId="{39C33904-05A0-4AE7-AD80-C6D4EDA45C99}" dt="2026-04-17T13:17:36.305" v="19" actId="1076"/>
+      <pc:sldChg chg="delSp">
+        <pc:chgData name="Nicolas Cabezas" userId="S::nicolas.cabezas@vantrust.cl::858cceca-9205-4b14-b063-d9dbf783859e" providerId="AD" clId="Web-{6B86EE34-FED3-9153-BB57-FAE40BEF2E88}" dt="2026-03-03T20:18:10.944" v="0"/>
         <pc:sldMkLst>
           <pc:docMk/>
-          <pc:sldMk cId="1755179955" sldId="257"/>
+          <pc:sldMk cId="1784530740" sldId="258"/>
         </pc:sldMkLst>
         <pc:graphicFrameChg chg="del">
-          <ac:chgData name="María Isabel Velasco Retamal" userId="ea7c3d35-c8ba-4f00-aa41-aa3196d0b536" providerId="ADAL" clId="{39C33904-05A0-4AE7-AD80-C6D4EDA45C99}" dt="2026-04-17T13:17:13.257" v="17" actId="478"/>
+          <ac:chgData name="Nicolas Cabezas" userId="S::nicolas.cabezas@vantrust.cl::858cceca-9205-4b14-b063-d9dbf783859e" providerId="AD" clId="Web-{6B86EE34-FED3-9153-BB57-FAE40BEF2E88}" dt="2026-03-03T20:18:10.944" v="0"/>
           <ac:graphicFrameMkLst>
             <pc:docMk/>
-            <pc:sldMk cId="1755179955" sldId="257"/>
-            <ac:graphicFrameMk id="5" creationId="{17D77BF0-DADB-B746-2770-8A24B8E71141}"/>
-          </ac:graphicFrameMkLst>
-        </pc:graphicFrameChg>
-        <pc:graphicFrameChg chg="mod">
-          <ac:chgData name="María Isabel Velasco Retamal" userId="ea7c3d35-c8ba-4f00-aa41-aa3196d0b536" providerId="ADAL" clId="{39C33904-05A0-4AE7-AD80-C6D4EDA45C99}" dt="2026-04-17T13:17:36.305" v="19" actId="1076"/>
-          <ac:graphicFrameMkLst>
-            <pc:docMk/>
-            <pc:sldMk cId="1755179955" sldId="257"/>
-            <ac:graphicFrameMk id="8" creationId="{79614184-16AF-775E-F929-95C421554D04}"/>
-          </ac:graphicFrameMkLst>
-        </pc:graphicFrameChg>
-        <pc:graphicFrameChg chg="del">
-          <ac:chgData name="María Isabel Velasco Retamal" userId="ea7c3d35-c8ba-4f00-aa41-aa3196d0b536" providerId="ADAL" clId="{39C33904-05A0-4AE7-AD80-C6D4EDA45C99}" dt="2026-04-17T13:17:16.685" v="18" actId="478"/>
-          <ac:graphicFrameMkLst>
-            <pc:docMk/>
-            <pc:sldMk cId="1755179955" sldId="257"/>
-            <ac:graphicFrameMk id="13" creationId="{F756C95C-4A30-64E3-801E-65F07B97FDA5}"/>
-          </ac:graphicFrameMkLst>
-        </pc:graphicFrameChg>
-      </pc:sldChg>
-      <pc:sldChg chg="delSp modSp mod">
-        <pc:chgData name="María Isabel Velasco Retamal" userId="ea7c3d35-c8ba-4f00-aa41-aa3196d0b536" providerId="ADAL" clId="{39C33904-05A0-4AE7-AD80-C6D4EDA45C99}" dt="2026-04-17T13:16:20.328" v="16" actId="1076"/>
-        <pc:sldMkLst>
-          <pc:docMk/>
-          <pc:sldMk cId="1238690865" sldId="258"/>
-        </pc:sldMkLst>
-        <pc:spChg chg="mod">
-          <ac:chgData name="María Isabel Velasco Retamal" userId="ea7c3d35-c8ba-4f00-aa41-aa3196d0b536" providerId="ADAL" clId="{39C33904-05A0-4AE7-AD80-C6D4EDA45C99}" dt="2026-04-17T13:16:08.178" v="14" actId="1076"/>
-          <ac:spMkLst>
-            <pc:docMk/>
-            <pc:sldMk cId="1238690865" sldId="258"/>
-            <ac:spMk id="14" creationId="{81AAE09A-8F0A-1FF3-4AB4-5B9B11318669}"/>
-          </ac:spMkLst>
-        </pc:spChg>
-        <pc:graphicFrameChg chg="del">
-          <ac:chgData name="María Isabel Velasco Retamal" userId="ea7c3d35-c8ba-4f00-aa41-aa3196d0b536" providerId="ADAL" clId="{39C33904-05A0-4AE7-AD80-C6D4EDA45C99}" dt="2026-04-17T13:15:28.820" v="12" actId="478"/>
-          <ac:graphicFrameMkLst>
-            <pc:docMk/>
-            <pc:sldMk cId="1238690865" sldId="258"/>
-            <ac:graphicFrameMk id="10" creationId="{E804CFBD-B7D1-F13B-048E-321C4077833F}"/>
-          </ac:graphicFrameMkLst>
-        </pc:graphicFrameChg>
-        <pc:graphicFrameChg chg="mod">
-          <ac:chgData name="María Isabel Velasco Retamal" userId="ea7c3d35-c8ba-4f00-aa41-aa3196d0b536" providerId="ADAL" clId="{39C33904-05A0-4AE7-AD80-C6D4EDA45C99}" dt="2026-04-17T13:15:06.272" v="9" actId="14100"/>
-          <ac:graphicFrameMkLst>
-            <pc:docMk/>
-            <pc:sldMk cId="1238690865" sldId="258"/>
-            <ac:graphicFrameMk id="13" creationId="{AA7E63BD-E8BE-7240-9607-6C5F339E8426}"/>
-          </ac:graphicFrameMkLst>
-        </pc:graphicFrameChg>
-        <pc:graphicFrameChg chg="mod">
-          <ac:chgData name="María Isabel Velasco Retamal" userId="ea7c3d35-c8ba-4f00-aa41-aa3196d0b536" providerId="ADAL" clId="{39C33904-05A0-4AE7-AD80-C6D4EDA45C99}" dt="2026-04-17T13:16:20.328" v="16" actId="1076"/>
-          <ac:graphicFrameMkLst>
-            <pc:docMk/>
-            <pc:sldMk cId="1238690865" sldId="258"/>
-            <ac:graphicFrameMk id="15" creationId="{2B1AEACE-0FF2-4ABC-E3A1-AA20DC8F1229}"/>
-          </ac:graphicFrameMkLst>
-        </pc:graphicFrameChg>
-        <pc:graphicFrameChg chg="del mod">
-          <ac:chgData name="María Isabel Velasco Retamal" userId="ea7c3d35-c8ba-4f00-aa41-aa3196d0b536" providerId="ADAL" clId="{39C33904-05A0-4AE7-AD80-C6D4EDA45C99}" dt="2026-04-17T13:15:10.789" v="10" actId="478"/>
-          <ac:graphicFrameMkLst>
-            <pc:docMk/>
-            <pc:sldMk cId="1238690865" sldId="258"/>
-            <ac:graphicFrameMk id="16" creationId="{3449BD50-7FE9-4BCC-0329-6B23C4D489DE}"/>
-          </ac:graphicFrameMkLst>
-        </pc:graphicFrameChg>
-        <pc:graphicFrameChg chg="mod">
-          <ac:chgData name="María Isabel Velasco Retamal" userId="ea7c3d35-c8ba-4f00-aa41-aa3196d0b536" providerId="ADAL" clId="{39C33904-05A0-4AE7-AD80-C6D4EDA45C99}" dt="2026-04-17T13:15:24.867" v="11" actId="1076"/>
-          <ac:graphicFrameMkLst>
-            <pc:docMk/>
-            <pc:sldMk cId="1238690865" sldId="258"/>
-            <ac:graphicFrameMk id="17" creationId="{B6DEE0C1-C4F3-673E-15EC-9B1B5F9CD8B9}"/>
-          </ac:graphicFrameMkLst>
-        </pc:graphicFrameChg>
-        <pc:graphicFrameChg chg="del">
-          <ac:chgData name="María Isabel Velasco Retamal" userId="ea7c3d35-c8ba-4f00-aa41-aa3196d0b536" providerId="ADAL" clId="{39C33904-05A0-4AE7-AD80-C6D4EDA45C99}" dt="2026-04-17T13:14:25.984" v="2" actId="478"/>
-          <ac:graphicFrameMkLst>
-            <pc:docMk/>
-            <pc:sldMk cId="1238690865" sldId="258"/>
-            <ac:graphicFrameMk id="18" creationId="{CF60F398-8908-6290-B793-E0CC08C7D502}"/>
-          </ac:graphicFrameMkLst>
-        </pc:graphicFrameChg>
-        <pc:graphicFrameChg chg="mod">
-          <ac:chgData name="María Isabel Velasco Retamal" userId="ea7c3d35-c8ba-4f00-aa41-aa3196d0b536" providerId="ADAL" clId="{39C33904-05A0-4AE7-AD80-C6D4EDA45C99}" dt="2026-04-17T13:16:12.222" v="15" actId="1076"/>
-          <ac:graphicFrameMkLst>
-            <pc:docMk/>
-            <pc:sldMk cId="1238690865" sldId="258"/>
-            <ac:graphicFrameMk id="19" creationId="{2D7C7DC6-D265-F7EE-4A05-A09DC42CEDC7}"/>
+            <pc:sldMk cId="1784530740" sldId="258"/>
+            <ac:graphicFrameMk id="17" creationId="{0F0156AB-F19D-924E-FD68-DFC446F5ED74}"/>
           </ac:graphicFrameMkLst>
         </pc:graphicFrameChg>
       </pc:sldChg>
@@ -368,7 +281,7 @@
           <a:p>
             <a:fld id="{69AB2248-3135-524B-AE6E-AF0BD3784818}" type="datetimeFigureOut">
               <a:rPr lang="es-CL" smtClean="0"/>
-              <a:t>17-04-2026</a:t>
+              <a:t>03-03-2026</a:t>
             </a:fld>
             <a:endParaRPr lang="es-CL"/>
           </a:p>
@@ -410,7 +323,7 @@
           <a:p>
             <a:fld id="{A6476932-3974-7242-A893-FB24877E8926}" type="slidenum">
               <a:rPr lang="es-CL" smtClean="0"/>
-              <a:t>‹Nº›</a:t>
+              <a:t>‹#›</a:t>
             </a:fld>
             <a:endParaRPr lang="es-CL"/>
           </a:p>
@@ -538,7 +451,7 @@
           <a:p>
             <a:fld id="{69AB2248-3135-524B-AE6E-AF0BD3784818}" type="datetimeFigureOut">
               <a:rPr lang="es-CL" smtClean="0"/>
-              <a:t>17-04-2026</a:t>
+              <a:t>03-03-2026</a:t>
             </a:fld>
             <a:endParaRPr lang="es-CL"/>
           </a:p>
@@ -580,7 +493,7 @@
           <a:p>
             <a:fld id="{A6476932-3974-7242-A893-FB24877E8926}" type="slidenum">
               <a:rPr lang="es-CL" smtClean="0"/>
-              <a:t>‹Nº›</a:t>
+              <a:t>‹#›</a:t>
             </a:fld>
             <a:endParaRPr lang="es-CL"/>
           </a:p>
@@ -718,7 +631,7 @@
           <a:p>
             <a:fld id="{69AB2248-3135-524B-AE6E-AF0BD3784818}" type="datetimeFigureOut">
               <a:rPr lang="es-CL" smtClean="0"/>
-              <a:t>17-04-2026</a:t>
+              <a:t>03-03-2026</a:t>
             </a:fld>
             <a:endParaRPr lang="es-CL"/>
           </a:p>
@@ -760,7 +673,7 @@
           <a:p>
             <a:fld id="{A6476932-3974-7242-A893-FB24877E8926}" type="slidenum">
               <a:rPr lang="es-CL" smtClean="0"/>
-              <a:t>‹Nº›</a:t>
+              <a:t>‹#›</a:t>
             </a:fld>
             <a:endParaRPr lang="es-CL"/>
           </a:p>
@@ -888,7 +801,7 @@
           <a:p>
             <a:fld id="{69AB2248-3135-524B-AE6E-AF0BD3784818}" type="datetimeFigureOut">
               <a:rPr lang="es-CL" smtClean="0"/>
-              <a:t>17-04-2026</a:t>
+              <a:t>03-03-2026</a:t>
             </a:fld>
             <a:endParaRPr lang="es-CL"/>
           </a:p>
@@ -930,7 +843,7 @@
           <a:p>
             <a:fld id="{A6476932-3974-7242-A893-FB24877E8926}" type="slidenum">
               <a:rPr lang="es-CL" smtClean="0"/>
-              <a:t>‹Nº›</a:t>
+              <a:t>‹#›</a:t>
             </a:fld>
             <a:endParaRPr lang="es-CL"/>
           </a:p>
@@ -1132,7 +1045,7 @@
           <a:p>
             <a:fld id="{69AB2248-3135-524B-AE6E-AF0BD3784818}" type="datetimeFigureOut">
               <a:rPr lang="es-CL" smtClean="0"/>
-              <a:t>17-04-2026</a:t>
+              <a:t>03-03-2026</a:t>
             </a:fld>
             <a:endParaRPr lang="es-CL"/>
           </a:p>
@@ -1174,7 +1087,7 @@
           <a:p>
             <a:fld id="{A6476932-3974-7242-A893-FB24877E8926}" type="slidenum">
               <a:rPr lang="es-CL" smtClean="0"/>
-              <a:t>‹Nº›</a:t>
+              <a:t>‹#›</a:t>
             </a:fld>
             <a:endParaRPr lang="es-CL"/>
           </a:p>
@@ -1364,7 +1277,7 @@
           <a:p>
             <a:fld id="{69AB2248-3135-524B-AE6E-AF0BD3784818}" type="datetimeFigureOut">
               <a:rPr lang="es-CL" smtClean="0"/>
-              <a:t>17-04-2026</a:t>
+              <a:t>03-03-2026</a:t>
             </a:fld>
             <a:endParaRPr lang="es-CL"/>
           </a:p>
@@ -1406,7 +1319,7 @@
           <a:p>
             <a:fld id="{A6476932-3974-7242-A893-FB24877E8926}" type="slidenum">
               <a:rPr lang="es-CL" smtClean="0"/>
-              <a:t>‹Nº›</a:t>
+              <a:t>‹#›</a:t>
             </a:fld>
             <a:endParaRPr lang="es-CL"/>
           </a:p>
@@ -1731,7 +1644,7 @@
           <a:p>
             <a:fld id="{69AB2248-3135-524B-AE6E-AF0BD3784818}" type="datetimeFigureOut">
               <a:rPr lang="es-CL" smtClean="0"/>
-              <a:t>17-04-2026</a:t>
+              <a:t>03-03-2026</a:t>
             </a:fld>
             <a:endParaRPr lang="es-CL"/>
           </a:p>
@@ -1773,7 +1686,7 @@
           <a:p>
             <a:fld id="{A6476932-3974-7242-A893-FB24877E8926}" type="slidenum">
               <a:rPr lang="es-CL" smtClean="0"/>
-              <a:t>‹Nº›</a:t>
+              <a:t>‹#›</a:t>
             </a:fld>
             <a:endParaRPr lang="es-CL"/>
           </a:p>
@@ -1849,7 +1762,7 @@
           <a:p>
             <a:fld id="{69AB2248-3135-524B-AE6E-AF0BD3784818}" type="datetimeFigureOut">
               <a:rPr lang="es-CL" smtClean="0"/>
-              <a:t>17-04-2026</a:t>
+              <a:t>03-03-2026</a:t>
             </a:fld>
             <a:endParaRPr lang="es-CL"/>
           </a:p>
@@ -1891,7 +1804,7 @@
           <a:p>
             <a:fld id="{A6476932-3974-7242-A893-FB24877E8926}" type="slidenum">
               <a:rPr lang="es-CL" smtClean="0"/>
-              <a:t>‹Nº›</a:t>
+              <a:t>‹#›</a:t>
             </a:fld>
             <a:endParaRPr lang="es-CL"/>
           </a:p>
@@ -1944,7 +1857,7 @@
           <a:p>
             <a:fld id="{69AB2248-3135-524B-AE6E-AF0BD3784818}" type="datetimeFigureOut">
               <a:rPr lang="es-CL" smtClean="0"/>
-              <a:t>17-04-2026</a:t>
+              <a:t>03-03-2026</a:t>
             </a:fld>
             <a:endParaRPr lang="es-CL"/>
           </a:p>
@@ -1986,7 +1899,7 @@
           <a:p>
             <a:fld id="{A6476932-3974-7242-A893-FB24877E8926}" type="slidenum">
               <a:rPr lang="es-CL" smtClean="0"/>
-              <a:t>‹Nº›</a:t>
+              <a:t>‹#›</a:t>
             </a:fld>
             <a:endParaRPr lang="es-CL"/>
           </a:p>
@@ -2221,7 +2134,7 @@
           <a:p>
             <a:fld id="{69AB2248-3135-524B-AE6E-AF0BD3784818}" type="datetimeFigureOut">
               <a:rPr lang="es-CL" smtClean="0"/>
-              <a:t>17-04-2026</a:t>
+              <a:t>03-03-2026</a:t>
             </a:fld>
             <a:endParaRPr lang="es-CL"/>
           </a:p>
@@ -2263,7 +2176,7 @@
           <a:p>
             <a:fld id="{A6476932-3974-7242-A893-FB24877E8926}" type="slidenum">
               <a:rPr lang="es-CL" smtClean="0"/>
-              <a:t>‹Nº›</a:t>
+              <a:t>‹#›</a:t>
             </a:fld>
             <a:endParaRPr lang="es-CL"/>
           </a:p>
@@ -2478,7 +2391,7 @@
           <a:p>
             <a:fld id="{69AB2248-3135-524B-AE6E-AF0BD3784818}" type="datetimeFigureOut">
               <a:rPr lang="es-CL" smtClean="0"/>
-              <a:t>17-04-2026</a:t>
+              <a:t>03-03-2026</a:t>
             </a:fld>
             <a:endParaRPr lang="es-CL"/>
           </a:p>
@@ -2520,7 +2433,7 @@
           <a:p>
             <a:fld id="{A6476932-3974-7242-A893-FB24877E8926}" type="slidenum">
               <a:rPr lang="es-CL" smtClean="0"/>
-              <a:t>‹Nº›</a:t>
+              <a:t>‹#›</a:t>
             </a:fld>
             <a:endParaRPr lang="es-CL"/>
           </a:p>
@@ -2691,7 +2604,7 @@
           <a:p>
             <a:fld id="{69AB2248-3135-524B-AE6E-AF0BD3784818}" type="datetimeFigureOut">
               <a:rPr lang="es-CL" smtClean="0"/>
-              <a:t>17-04-2026</a:t>
+              <a:t>03-03-2026</a:t>
             </a:fld>
             <a:endParaRPr lang="es-CL"/>
           </a:p>
@@ -2769,7 +2682,7 @@
           <a:p>
             <a:fld id="{A6476932-3974-7242-A893-FB24877E8926}" type="slidenum">
               <a:rPr lang="es-CL" smtClean="0"/>
-              <a:t>‹Nº›</a:t>
+              <a:t>‹#›</a:t>
             </a:fld>
             <a:endParaRPr lang="es-CL"/>
           </a:p>
@@ -3148,35 +3061,6 @@
           </a:p>
         </p:txBody>
       </p:sp>
-      <p:pic>
-        <p:nvPicPr>
-          <p:cNvPr id="34" name="Imagen 33">
-            <a:extLst>
-              <a:ext uri="{FF2B5EF4-FFF2-40B4-BE49-F238E27FC236}">
-                <a16:creationId xmlns:a16="http://schemas.microsoft.com/office/drawing/2014/main" id="{A4B7535E-8C11-CED1-C8C3-729CEBEC03C9}"/>
-              </a:ext>
-            </a:extLst>
-          </p:cNvPr>
-          <p:cNvPicPr>
-            <a:picLocks noChangeAspect="1"/>
-          </p:cNvPicPr>
-          <p:nvPr/>
-        </p:nvPicPr>
-        <p:blipFill rotWithShape="1">
-          <a:blip r:embed="rId2"/>
-          <a:srcRect t="-2699" b="8009"/>
-          <a:stretch/>
-        </p:blipFill>
-        <p:spPr>
-          <a:xfrm>
-            <a:off x="-27428" y="0"/>
-            <a:ext cx="8851900" cy="10847100"/>
-          </a:xfrm>
-          <a:prstGeom prst="rect">
-            <a:avLst/>
-          </a:prstGeom>
-        </p:spPr>
-      </p:pic>
       <p:sp>
         <p:nvSpPr>
           <p:cNvPr id="7" name="CuadroTexto 6">
@@ -3212,7 +3096,7 @@
                 </a:solidFill>
                 <a:latin typeface="Be Vietnam Pro" pitchFamily="2" charset="77"/>
               </a:rPr>
-              <a:t>Liquidez</a:t>
+              <a:t>Alto</a:t>
             </a:r>
           </a:p>
           <a:p>
@@ -3223,7 +3107,7 @@
                 </a:solidFill>
                 <a:latin typeface="Be Vietnam Pro" pitchFamily="2" charset="77"/>
               </a:rPr>
-              <a:t>Activa</a:t>
+              <a:t>Aporte</a:t>
             </a:r>
           </a:p>
         </p:txBody>
@@ -3326,7 +3210,7 @@
         </p:nvSpPr>
         <p:spPr>
           <a:xfrm>
-            <a:off x="3665708" y="1127347"/>
+            <a:off x="3717452" y="1088123"/>
             <a:ext cx="4414885" cy="407804"/>
           </a:xfrm>
           <a:prstGeom prst="rect">
@@ -3403,7 +3287,7 @@
         </p:nvSpPr>
         <p:spPr>
           <a:xfrm>
-            <a:off x="3717452" y="6304500"/>
+            <a:off x="3717452" y="6162794"/>
             <a:ext cx="4414885" cy="407804"/>
           </a:xfrm>
           <a:prstGeom prst="rect">
@@ -3689,7 +3573,7 @@
                 <a:latin typeface="Be Vietnam Pro Thin" pitchFamily="2" charset="77"/>
                 <a:ea typeface="Calibri" panose="020F0502020204030204" pitchFamily="34" charset="0"/>
               </a:rPr>
-              <a:t> Liquidez Caja, es la tasa de política monetaria promedio del Banco Central de Chile.</a:t>
+              <a:t> Alto Aporte, es la tasa de política monetaria promedio del Banco Central de Chile.</a:t>
             </a:r>
           </a:p>
         </p:txBody>
@@ -3833,7 +3717,7 @@
         <p:spPr>
           <a:xfrm>
             <a:off x="196763" y="3524690"/>
-            <a:ext cx="2870375" cy="3211264"/>
+            <a:ext cx="2870375" cy="3026598"/>
           </a:xfrm>
           <a:prstGeom prst="rect">
             <a:avLst/>
@@ -4025,6 +3909,20 @@
                 <a:spcPct val="150000"/>
               </a:lnSpc>
             </a:pPr>
+            <a:endParaRPr lang="es-CL" sz="800" dirty="0">
+              <a:solidFill>
+                <a:schemeClr val="bg1"/>
+              </a:solidFill>
+              <a:latin typeface="Be Vietnam Pro Thin" pitchFamily="2" charset="77"/>
+              <a:ea typeface="Calibri" panose="020F0502020204030204" pitchFamily="34" charset="0"/>
+            </a:endParaRPr>
+          </a:p>
+          <a:p>
+            <a:pPr>
+              <a:lnSpc>
+                <a:spcPct val="150000"/>
+              </a:lnSpc>
+            </a:pPr>
             <a:r>
               <a:rPr lang="es-CL" sz="800" dirty="0">
                 <a:solidFill>
@@ -4034,6 +3932,23 @@
                 <a:ea typeface="Calibri" panose="020F0502020204030204" pitchFamily="34" charset="0"/>
               </a:rPr>
               <a:t>Remuneración</a:t>
+            </a:r>
+          </a:p>
+          <a:p>
+            <a:pPr>
+              <a:lnSpc>
+                <a:spcPct val="150000"/>
+              </a:lnSpc>
+            </a:pPr>
+            <a:r>
+              <a:rPr lang="es-CL" sz="800" dirty="0">
+                <a:solidFill>
+                  <a:schemeClr val="bg1"/>
+                </a:solidFill>
+                <a:latin typeface="Be Vietnam Pro Thin" pitchFamily="2" charset="77"/>
+                <a:ea typeface="Calibri" panose="020F0502020204030204" pitchFamily="34" charset="0"/>
+              </a:rPr>
+              <a:t>Custodio</a:t>
             </a:r>
           </a:p>
           <a:p>
@@ -4070,13 +3985,211 @@
                 <a:spcPct val="150000"/>
               </a:lnSpc>
             </a:pPr>
-            <a:endParaRPr lang="es-CL" sz="800" dirty="0">
-              <a:solidFill>
-                <a:schemeClr val="bg1"/>
-              </a:solidFill>
-              <a:latin typeface="Be Vietnam Pro Thin" pitchFamily="2" charset="77"/>
-              <a:ea typeface="Calibri" panose="020F0502020204030204" pitchFamily="34" charset="0"/>
-            </a:endParaRPr>
+            <a:r>
+              <a:rPr lang="es-CL" sz="800" b="1" dirty="0">
+                <a:solidFill>
+                  <a:schemeClr val="bg1"/>
+                </a:solidFill>
+                <a:latin typeface="Be Vietnam Pro Thin" pitchFamily="2" charset="77"/>
+                <a:ea typeface="Calibri" panose="020F0502020204030204" pitchFamily="34" charset="0"/>
+              </a:rPr>
+              <a:t>Mínimo de Inversión Inicial: $300.000.000 .-</a:t>
+            </a:r>
+          </a:p>
+        </p:txBody>
+      </p:sp>
+      <p:sp>
+        <p:nvSpPr>
+          <p:cNvPr id="31" name="CuadroTexto 30">
+            <a:extLst>
+              <a:ext uri="{FF2B5EF4-FFF2-40B4-BE49-F238E27FC236}">
+                <a16:creationId xmlns:a16="http://schemas.microsoft.com/office/drawing/2014/main" id="{CBB94755-8987-0E74-F8A0-9C8A41125E05}"/>
+              </a:ext>
+            </a:extLst>
+          </p:cNvPr>
+          <p:cNvSpPr txBox="1"/>
+          <p:nvPr/>
+        </p:nvSpPr>
+        <p:spPr>
+          <a:xfrm>
+            <a:off x="1375723" y="3524690"/>
+            <a:ext cx="2005904" cy="2472600"/>
+          </a:xfrm>
+          <a:prstGeom prst="rect">
+            <a:avLst/>
+          </a:prstGeom>
+          <a:noFill/>
+        </p:spPr>
+        <p:txBody>
+          <a:bodyPr wrap="square" rtlCol="0">
+            <a:spAutoFit/>
+          </a:bodyPr>
+          <a:lstStyle/>
+          <a:p>
+            <a:pPr>
+              <a:lnSpc>
+                <a:spcPct val="150000"/>
+              </a:lnSpc>
+            </a:pPr>
+            <a:r>
+              <a:rPr lang="es-CL" sz="800" dirty="0" err="1">
+                <a:solidFill>
+                  <a:schemeClr val="bg1"/>
+                </a:solidFill>
+                <a:latin typeface="Be Vietnam Pro Thin" pitchFamily="2" charset="77"/>
+                <a:ea typeface="Calibri" panose="020F0502020204030204" pitchFamily="34" charset="0"/>
+              </a:rPr>
+              <a:t>Vantrust</a:t>
+            </a:r>
+            <a:r>
+              <a:rPr lang="es-CL" sz="800" dirty="0">
+                <a:solidFill>
+                  <a:schemeClr val="bg1"/>
+                </a:solidFill>
+                <a:latin typeface="Be Vietnam Pro Thin" pitchFamily="2" charset="77"/>
+                <a:ea typeface="Calibri" panose="020F0502020204030204" pitchFamily="34" charset="0"/>
+              </a:rPr>
+              <a:t> </a:t>
+            </a:r>
+            <a:r>
+              <a:rPr lang="es-CL" sz="800" dirty="0" err="1">
+                <a:solidFill>
+                  <a:schemeClr val="bg1"/>
+                </a:solidFill>
+                <a:latin typeface="Be Vietnam Pro Thin" pitchFamily="2" charset="77"/>
+                <a:ea typeface="Calibri" panose="020F0502020204030204" pitchFamily="34" charset="0"/>
+              </a:rPr>
+              <a:t>Gestion</a:t>
+            </a:r>
+            <a:r>
+              <a:rPr lang="es-CL" sz="800" dirty="0">
+                <a:solidFill>
+                  <a:schemeClr val="bg1"/>
+                </a:solidFill>
+                <a:latin typeface="Be Vietnam Pro Thin" pitchFamily="2" charset="77"/>
+                <a:ea typeface="Calibri" panose="020F0502020204030204" pitchFamily="34" charset="0"/>
+              </a:rPr>
+              <a:t> Patrimonial S.A. 77.270.966-8</a:t>
+            </a:r>
+          </a:p>
+          <a:p>
+            <a:pPr>
+              <a:lnSpc>
+                <a:spcPct val="150000"/>
+              </a:lnSpc>
+            </a:pPr>
+            <a:r>
+              <a:rPr lang="es-CL" sz="800" dirty="0">
+                <a:solidFill>
+                  <a:schemeClr val="bg1"/>
+                </a:solidFill>
+                <a:latin typeface="Be Vietnam Pro Thin" pitchFamily="2" charset="77"/>
+                <a:ea typeface="Calibri" panose="020F0502020204030204" pitchFamily="34" charset="0"/>
+              </a:rPr>
+              <a:t>CLP</a:t>
+            </a:r>
+          </a:p>
+          <a:p>
+            <a:pPr>
+              <a:lnSpc>
+                <a:spcPct val="150000"/>
+              </a:lnSpc>
+            </a:pPr>
+            <a:r>
+              <a:rPr lang="es-CL" sz="800" dirty="0">
+                <a:solidFill>
+                  <a:schemeClr val="bg1"/>
+                </a:solidFill>
+                <a:latin typeface="Be Vietnam Pro Thin" pitchFamily="2" charset="77"/>
+                <a:ea typeface="Calibri" panose="020F0502020204030204" pitchFamily="34" charset="0"/>
+              </a:rPr>
+              <a:t>Fondo de Inversión Privado</a:t>
+            </a:r>
+          </a:p>
+          <a:p>
+            <a:pPr>
+              <a:lnSpc>
+                <a:spcPct val="150000"/>
+              </a:lnSpc>
+            </a:pPr>
+            <a:r>
+              <a:rPr lang="es-CL" sz="800" dirty="0">
+                <a:solidFill>
+                  <a:schemeClr val="bg1"/>
+                </a:solidFill>
+                <a:latin typeface="Be Vietnam Pro Thin" pitchFamily="2" charset="77"/>
+                <a:ea typeface="Calibri" panose="020F0502020204030204" pitchFamily="34" charset="0"/>
+              </a:rPr>
+              <a:t>Julio 2022</a:t>
+            </a:r>
+          </a:p>
+          <a:p>
+            <a:pPr>
+              <a:lnSpc>
+                <a:spcPct val="150000"/>
+              </a:lnSpc>
+            </a:pPr>
+            <a:r>
+              <a:rPr lang="es-CL" sz="800" dirty="0">
+                <a:solidFill>
+                  <a:schemeClr val="bg1"/>
+                </a:solidFill>
+                <a:latin typeface="Be Vietnam Pro Thin" pitchFamily="2" charset="77"/>
+                <a:ea typeface="Calibri" panose="020F0502020204030204" pitchFamily="34" charset="0"/>
+              </a:rPr>
+              <a:t>Índice Cámara Promedio (ICP)</a:t>
+            </a:r>
+          </a:p>
+          <a:p>
+            <a:pPr>
+              <a:lnSpc>
+                <a:spcPct val="150000"/>
+              </a:lnSpc>
+            </a:pPr>
+            <a:r>
+              <a:rPr lang="es-CL" sz="800" dirty="0">
+                <a:solidFill>
+                  <a:schemeClr val="bg1"/>
+                </a:solidFill>
+                <a:latin typeface="Be Vietnam Pro Thin" pitchFamily="2" charset="77"/>
+                <a:ea typeface="Calibri" panose="020F0502020204030204" pitchFamily="34" charset="0"/>
+              </a:rPr>
+              <a:t>Si</a:t>
+            </a:r>
+          </a:p>
+          <a:p>
+            <a:pPr>
+              <a:lnSpc>
+                <a:spcPct val="150000"/>
+              </a:lnSpc>
+            </a:pPr>
+            <a:r>
+              <a:rPr lang="es-CL" sz="800" dirty="0">
+                <a:solidFill>
+                  <a:schemeClr val="bg1"/>
+                </a:solidFill>
+                <a:latin typeface="Be Vietnam Pro Thin" pitchFamily="2" charset="77"/>
+                <a:ea typeface="Calibri" panose="020F0502020204030204" pitchFamily="34" charset="0"/>
+              </a:rPr>
+              <a:t>A más tardar 15 días corridos</a:t>
+            </a:r>
+          </a:p>
+          <a:p>
+            <a:pPr>
+              <a:lnSpc>
+                <a:spcPct val="150000"/>
+              </a:lnSpc>
+            </a:pPr>
+            <a:r>
+              <a:rPr lang="es-CL" sz="800" dirty="0">
+                <a:solidFill>
+                  <a:schemeClr val="bg1"/>
+                </a:solidFill>
+                <a:latin typeface="Be Vietnam Pro Thin" pitchFamily="2" charset="77"/>
+                <a:ea typeface="Calibri" panose="020F0502020204030204" pitchFamily="34" charset="0"/>
+              </a:rPr>
+              <a:t>Mercado- Crédito - Liquidez  - Tasa de interés - Derivados</a:t>
+            </a:r>
           </a:p>
           <a:p>
             <a:pPr>
@@ -4106,203 +4219,7 @@
                 <a:latin typeface="Be Vietnam Pro Thin" pitchFamily="2" charset="77"/>
                 <a:ea typeface="Calibri" panose="020F0502020204030204" pitchFamily="34" charset="0"/>
               </a:rPr>
-              <a:t>Custodio</a:t>
-            </a:r>
-          </a:p>
-          <a:p>
-            <a:pPr>
-              <a:lnSpc>
-                <a:spcPct val="150000"/>
-              </a:lnSpc>
-            </a:pPr>
-            <a:endParaRPr lang="es-CL" sz="800" dirty="0">
-              <a:solidFill>
-                <a:schemeClr val="bg1"/>
-              </a:solidFill>
-              <a:latin typeface="Be Vietnam Pro Thin" pitchFamily="2" charset="77"/>
-              <a:ea typeface="Calibri" panose="020F0502020204030204" pitchFamily="34" charset="0"/>
-            </a:endParaRPr>
-          </a:p>
-        </p:txBody>
-      </p:sp>
-      <p:sp>
-        <p:nvSpPr>
-          <p:cNvPr id="31" name="CuadroTexto 30">
-            <a:extLst>
-              <a:ext uri="{FF2B5EF4-FFF2-40B4-BE49-F238E27FC236}">
-                <a16:creationId xmlns:a16="http://schemas.microsoft.com/office/drawing/2014/main" id="{CBB94755-8987-0E74-F8A0-9C8A41125E05}"/>
-              </a:ext>
-            </a:extLst>
-          </p:cNvPr>
-          <p:cNvSpPr txBox="1"/>
-          <p:nvPr/>
-        </p:nvSpPr>
-        <p:spPr>
-          <a:xfrm>
-            <a:off x="1240403" y="3524690"/>
-            <a:ext cx="2141224" cy="3026598"/>
-          </a:xfrm>
-          <a:prstGeom prst="rect">
-            <a:avLst/>
-          </a:prstGeom>
-          <a:noFill/>
-        </p:spPr>
-        <p:txBody>
-          <a:bodyPr wrap="square" rtlCol="0">
-            <a:spAutoFit/>
-          </a:bodyPr>
-          <a:lstStyle/>
-          <a:p>
-            <a:pPr>
-              <a:lnSpc>
-                <a:spcPct val="150000"/>
-              </a:lnSpc>
-            </a:pPr>
-            <a:r>
-              <a:rPr lang="es-CL" sz="800" dirty="0">
-                <a:solidFill>
-                  <a:schemeClr val="bg1"/>
-                </a:solidFill>
-                <a:latin typeface="Be Vietnam Pro Thin" pitchFamily="2" charset="77"/>
-                <a:ea typeface="Calibri" panose="020F0502020204030204" pitchFamily="34" charset="0"/>
-              </a:rPr>
-              <a:t>Vantrust Gestion Patrimonial S.A. 76,637,334-8</a:t>
-            </a:r>
-          </a:p>
-          <a:p>
-            <a:pPr>
-              <a:lnSpc>
-                <a:spcPct val="150000"/>
-              </a:lnSpc>
-            </a:pPr>
-            <a:r>
-              <a:rPr lang="es-CL" sz="800" dirty="0">
-                <a:solidFill>
-                  <a:schemeClr val="bg1"/>
-                </a:solidFill>
-                <a:latin typeface="Be Vietnam Pro Thin" pitchFamily="2" charset="77"/>
-                <a:ea typeface="Calibri" panose="020F0502020204030204" pitchFamily="34" charset="0"/>
-              </a:rPr>
-              <a:t>CLP</a:t>
-            </a:r>
-          </a:p>
-          <a:p>
-            <a:pPr>
-              <a:lnSpc>
-                <a:spcPct val="150000"/>
-              </a:lnSpc>
-            </a:pPr>
-            <a:r>
-              <a:rPr lang="es-CL" sz="800" dirty="0">
-                <a:solidFill>
-                  <a:schemeClr val="bg1"/>
-                </a:solidFill>
-                <a:latin typeface="Be Vietnam Pro Thin" pitchFamily="2" charset="77"/>
-                <a:ea typeface="Calibri" panose="020F0502020204030204" pitchFamily="34" charset="0"/>
-              </a:rPr>
-              <a:t>Fondo de Inversión Privado</a:t>
-            </a:r>
-          </a:p>
-          <a:p>
-            <a:pPr>
-              <a:lnSpc>
-                <a:spcPct val="150000"/>
-              </a:lnSpc>
-            </a:pPr>
-            <a:r>
-              <a:rPr lang="es-CL" sz="800" dirty="0">
-                <a:solidFill>
-                  <a:schemeClr val="bg1"/>
-                </a:solidFill>
-                <a:latin typeface="Be Vietnam Pro Thin" pitchFamily="2" charset="77"/>
-                <a:ea typeface="Calibri" panose="020F0502020204030204" pitchFamily="34" charset="0"/>
-              </a:rPr>
-              <a:t>Febrero 2025</a:t>
-            </a:r>
-          </a:p>
-          <a:p>
-            <a:pPr>
-              <a:lnSpc>
-                <a:spcPct val="150000"/>
-              </a:lnSpc>
-            </a:pPr>
-            <a:r>
-              <a:rPr lang="es-CL" sz="800" dirty="0">
-                <a:solidFill>
-                  <a:schemeClr val="bg1"/>
-                </a:solidFill>
-                <a:latin typeface="Be Vietnam Pro Thin" pitchFamily="2" charset="77"/>
-                <a:ea typeface="Calibri" panose="020F0502020204030204" pitchFamily="34" charset="0"/>
-              </a:rPr>
-              <a:t>Índice Cámara Promedio (ICP)</a:t>
-            </a:r>
-          </a:p>
-          <a:p>
-            <a:pPr>
-              <a:lnSpc>
-                <a:spcPct val="150000"/>
-              </a:lnSpc>
-            </a:pPr>
-            <a:r>
-              <a:rPr lang="es-CL" sz="800" dirty="0">
-                <a:solidFill>
-                  <a:schemeClr val="bg1"/>
-                </a:solidFill>
-                <a:latin typeface="Be Vietnam Pro Thin" pitchFamily="2" charset="77"/>
-                <a:ea typeface="Calibri" panose="020F0502020204030204" pitchFamily="34" charset="0"/>
-              </a:rPr>
-              <a:t>Si</a:t>
-            </a:r>
-          </a:p>
-          <a:p>
-            <a:pPr>
-              <a:lnSpc>
-                <a:spcPct val="150000"/>
-              </a:lnSpc>
-            </a:pPr>
-            <a:r>
-              <a:rPr lang="es-CL" sz="800" dirty="0">
-                <a:solidFill>
-                  <a:schemeClr val="bg1"/>
-                </a:solidFill>
-                <a:latin typeface="Be Vietnam Pro Thin" pitchFamily="2" charset="77"/>
-                <a:ea typeface="Calibri" panose="020F0502020204030204" pitchFamily="34" charset="0"/>
-              </a:rPr>
-              <a:t>A más tardar 15 días corridos</a:t>
-            </a:r>
-          </a:p>
-          <a:p>
-            <a:pPr>
-              <a:lnSpc>
-                <a:spcPct val="150000"/>
-              </a:lnSpc>
-            </a:pPr>
-            <a:r>
-              <a:rPr lang="es-CL" sz="800" dirty="0">
-                <a:solidFill>
-                  <a:schemeClr val="bg1"/>
-                </a:solidFill>
-                <a:latin typeface="Be Vietnam Pro Thin" pitchFamily="2" charset="77"/>
-                <a:ea typeface="Calibri" panose="020F0502020204030204" pitchFamily="34" charset="0"/>
-              </a:rPr>
-              <a:t>Mercado- Crédito - Liquidez  - Tasa de interés - Derivados</a:t>
-            </a:r>
-          </a:p>
-          <a:p>
-            <a:pPr>
-              <a:lnSpc>
-                <a:spcPct val="150000"/>
-              </a:lnSpc>
-            </a:pPr>
-            <a:r>
-              <a:rPr lang="es-CL" sz="800" dirty="0">
-                <a:solidFill>
-                  <a:schemeClr val="bg1"/>
-                </a:solidFill>
-                <a:latin typeface="Be Vietnam Pro Thin" pitchFamily="2" charset="77"/>
-                <a:ea typeface="Calibri" panose="020F0502020204030204" pitchFamily="34" charset="0"/>
-              </a:rPr>
-              <a:t>Comisión anual ascendente al menor valor entre 1.- 0,50% de la TPM vigente a la fecha de cálculo más IVA 2.- tasa 0,9520% (IVA incluido), esta comisión se irá devengando en forma diaria.</a:t>
+              <a:t>0,1785% IVA Incluido</a:t>
             </a:r>
           </a:p>
           <a:p>
@@ -4336,10 +4253,10 @@
       </p:sp>
       <p:cxnSp>
         <p:nvCxnSpPr>
-          <p:cNvPr id="32" name="Conector recto 31">
+          <p:cNvPr id="50" name="Conector recto 49">
             <a:extLst>
               <a:ext uri="{FF2B5EF4-FFF2-40B4-BE49-F238E27FC236}">
-                <a16:creationId xmlns:a16="http://schemas.microsoft.com/office/drawing/2014/main" id="{108D5F2F-542C-7FE2-9DC7-C294FEFB11D8}"/>
+                <a16:creationId xmlns:a16="http://schemas.microsoft.com/office/drawing/2014/main" id="{6F5638A7-23C2-BE95-F9B8-1E0EA82E8137}"/>
               </a:ext>
             </a:extLst>
           </p:cNvPr>
@@ -4350,7 +4267,7 @@
         </p:nvCxnSpPr>
         <p:spPr>
           <a:xfrm flipV="1">
-            <a:off x="3830320" y="8378655"/>
+            <a:off x="3830320" y="8316870"/>
             <a:ext cx="4607990" cy="11285"/>
           </a:xfrm>
           <a:prstGeom prst="line">
@@ -4381,10 +4298,10 @@
       </p:cxnSp>
       <p:cxnSp>
         <p:nvCxnSpPr>
-          <p:cNvPr id="33" name="Conector recto 32">
+          <p:cNvPr id="51" name="Conector recto 50">
             <a:extLst>
               <a:ext uri="{FF2B5EF4-FFF2-40B4-BE49-F238E27FC236}">
-                <a16:creationId xmlns:a16="http://schemas.microsoft.com/office/drawing/2014/main" id="{26063E8F-B819-F9F4-026B-8E43A803D23D}"/>
+                <a16:creationId xmlns:a16="http://schemas.microsoft.com/office/drawing/2014/main" id="{1D5E1689-A4B5-60DB-3125-15703FF8D0AC}"/>
               </a:ext>
             </a:extLst>
           </p:cNvPr>
@@ -4395,7 +4312,7 @@
         </p:nvCxnSpPr>
         <p:spPr>
           <a:xfrm>
-            <a:off x="3830320" y="11561992"/>
+            <a:off x="3830320" y="11500207"/>
             <a:ext cx="4568416" cy="0"/>
           </a:xfrm>
           <a:prstGeom prst="line">
@@ -4426,10 +4343,10 @@
       </p:cxnSp>
       <p:sp>
         <p:nvSpPr>
-          <p:cNvPr id="96" name="CuadroTexto 95">
+          <p:cNvPr id="85" name="CuadroTexto 84">
             <a:extLst>
               <a:ext uri="{FF2B5EF4-FFF2-40B4-BE49-F238E27FC236}">
-                <a16:creationId xmlns:a16="http://schemas.microsoft.com/office/drawing/2014/main" id="{28D5BAE3-C31B-76AC-F942-0A142835452E}"/>
+                <a16:creationId xmlns:a16="http://schemas.microsoft.com/office/drawing/2014/main" id="{64179553-6C4B-1F1B-A19E-EE3A684812AD}"/>
               </a:ext>
             </a:extLst>
           </p:cNvPr>
@@ -4438,7 +4355,7 @@
         </p:nvSpPr>
         <p:spPr>
           <a:xfrm>
-            <a:off x="3721117" y="8066891"/>
+            <a:off x="3721117" y="8005106"/>
             <a:ext cx="4679532" cy="246221"/>
           </a:xfrm>
           <a:prstGeom prst="rect">
@@ -4467,10 +4384,172 @@
           </a:p>
         </p:txBody>
       </p:sp>
+      <p:graphicFrame>
+        <p:nvGraphicFramePr>
+          <p:cNvPr id="15" name="Objeto 14">
+            <a:extLst>
+              <a:ext uri="{FF2B5EF4-FFF2-40B4-BE49-F238E27FC236}">
+                <a16:creationId xmlns:a16="http://schemas.microsoft.com/office/drawing/2014/main" id="{0E710717-E7D2-88EB-4D65-6D9178587930}"/>
+              </a:ext>
+            </a:extLst>
+          </p:cNvPr>
+          <p:cNvGraphicFramePr>
+            <a:graphicFrameLocks noChangeAspect="1"/>
+          </p:cNvGraphicFramePr>
+          <p:nvPr>
+            <p:extLst>
+              <p:ext uri="{D42A27DB-BD31-4B8C-83A1-F6EECF244321}">
+                <p14:modId xmlns:p14="http://schemas.microsoft.com/office/powerpoint/2010/main" val="472442303"/>
+              </p:ext>
+            </p:extLst>
+          </p:nvPr>
+        </p:nvGraphicFramePr>
+        <p:xfrm>
+          <a:off x="3886200" y="1524000"/>
+          <a:ext cx="4305300" cy="2066925"/>
+        </p:xfrm>
+        <a:graphic>
+          <a:graphicData uri="http://schemas.openxmlformats.org/presentationml/2006/ole">
+            <mc:AlternateContent xmlns:mc="http://schemas.openxmlformats.org/markup-compatibility/2006">
+              <mc:Choice xmlns:v="urn:schemas-microsoft-com:vml" Requires="v">
+                <p:oleObj name="Worksheet" r:id="rId2" imgW="4305405" imgH="2067110" progId="Excel.Sheet.12">
+                  <p:link updateAutomatic="1"/>
+                </p:oleObj>
+              </mc:Choice>
+              <mc:Fallback>
+                <p:oleObj name="Worksheet" r:id="rId2" imgW="4305405" imgH="2067110" progId="Excel.Sheet.12">
+                  <p:link updateAutomatic="1"/>
+                  <p:pic>
+                    <p:nvPicPr>
+                      <p:cNvPr id="15" name="Objeto 14">
+                        <a:extLst>
+                          <a:ext uri="{FF2B5EF4-FFF2-40B4-BE49-F238E27FC236}">
+                            <a16:creationId xmlns:a16="http://schemas.microsoft.com/office/drawing/2014/main" id="{0E710717-E7D2-88EB-4D65-6D9178587930}"/>
+                          </a:ext>
+                        </a:extLst>
+                      </p:cNvPr>
+                      <p:cNvPicPr/>
+                      <p:nvPr/>
+                    </p:nvPicPr>
+                    <p:blipFill>
+                      <a:blip r:embed="rId3"/>
+                      <a:stretch>
+                        <a:fillRect/>
+                      </a:stretch>
+                    </p:blipFill>
+                    <p:spPr>
+                      <a:xfrm>
+                        <a:off x="3886200" y="1524000"/>
+                        <a:ext cx="4305300" cy="2066925"/>
+                      </a:xfrm>
+                      <a:prstGeom prst="rect">
+                        <a:avLst/>
+                      </a:prstGeom>
+                    </p:spPr>
+                  </p:pic>
+                </p:oleObj>
+              </mc:Fallback>
+            </mc:AlternateContent>
+          </a:graphicData>
+        </a:graphic>
+      </p:graphicFrame>
+      <p:graphicFrame>
+        <p:nvGraphicFramePr>
+          <p:cNvPr id="16" name="Objeto 15">
+            <a:extLst>
+              <a:ext uri="{FF2B5EF4-FFF2-40B4-BE49-F238E27FC236}">
+                <a16:creationId xmlns:a16="http://schemas.microsoft.com/office/drawing/2014/main" id="{69C5A6DA-8D09-832F-FE36-0FBE903603E5}"/>
+              </a:ext>
+            </a:extLst>
+          </p:cNvPr>
+          <p:cNvGraphicFramePr>
+            <a:graphicFrameLocks noChangeAspect="1"/>
+          </p:cNvGraphicFramePr>
+          <p:nvPr>
+            <p:extLst>
+              <p:ext uri="{D42A27DB-BD31-4B8C-83A1-F6EECF244321}">
+                <p14:modId xmlns:p14="http://schemas.microsoft.com/office/powerpoint/2010/main" val="484783450"/>
+              </p:ext>
+            </p:extLst>
+          </p:nvPr>
+        </p:nvGraphicFramePr>
+        <p:xfrm>
+          <a:off x="3894138" y="3490913"/>
+          <a:ext cx="4292600" cy="2744787"/>
+        </p:xfrm>
+        <a:graphic>
+          <a:graphicData uri="http://schemas.openxmlformats.org/presentationml/2006/ole">
+            <mc:AlternateContent xmlns:mc="http://schemas.openxmlformats.org/markup-compatibility/2006">
+              <mc:Choice xmlns:v="urn:schemas-microsoft-com:vml" Requires="v">
+                <p:oleObj name="Worksheet" r:id="rId4" imgW="6410261" imgH="4447943" progId="Excel.Sheet.12">
+                  <p:link updateAutomatic="1"/>
+                </p:oleObj>
+              </mc:Choice>
+              <mc:Fallback>
+                <p:oleObj name="Worksheet" r:id="rId4" imgW="6410261" imgH="4447943" progId="Excel.Sheet.12">
+                  <p:link updateAutomatic="1"/>
+                  <p:pic>
+                    <p:nvPicPr>
+                      <p:cNvPr id="0" name=""/>
+                      <p:cNvPicPr/>
+                      <p:nvPr/>
+                    </p:nvPicPr>
+                    <p:blipFill>
+                      <a:blip r:embed="rId5"/>
+                      <a:stretch>
+                        <a:fillRect/>
+                      </a:stretch>
+                    </p:blipFill>
+                    <p:spPr>
+                      <a:xfrm>
+                        <a:off x="3894138" y="3490913"/>
+                        <a:ext cx="4292600" cy="2744787"/>
+                      </a:xfrm>
+                      <a:prstGeom prst="rect">
+                        <a:avLst/>
+                      </a:prstGeom>
+                    </p:spPr>
+                  </p:pic>
+                </p:oleObj>
+              </mc:Fallback>
+            </mc:AlternateContent>
+          </a:graphicData>
+        </a:graphic>
+      </p:graphicFrame>
+      <p:pic>
+        <p:nvPicPr>
+          <p:cNvPr id="13" name="Imagen 12">
+            <a:extLst>
+              <a:ext uri="{FF2B5EF4-FFF2-40B4-BE49-F238E27FC236}">
+                <a16:creationId xmlns:a16="http://schemas.microsoft.com/office/drawing/2014/main" id="{97836E50-891E-9C36-FEC2-DEB2BEB17FE9}"/>
+              </a:ext>
+            </a:extLst>
+          </p:cNvPr>
+          <p:cNvPicPr>
+            <a:picLocks noChangeAspect="1"/>
+          </p:cNvPicPr>
+          <p:nvPr/>
+        </p:nvPicPr>
+        <p:blipFill>
+          <a:blip r:embed="rId6"/>
+          <a:stretch>
+            <a:fillRect/>
+          </a:stretch>
+        </p:blipFill>
+        <p:spPr>
+          <a:xfrm>
+            <a:off x="3548142" y="6612030"/>
+            <a:ext cx="5201354" cy="720458"/>
+          </a:xfrm>
+          <a:prstGeom prst="rect">
+            <a:avLst/>
+          </a:prstGeom>
+        </p:spPr>
+      </p:pic>
     </p:spTree>
     <p:extLst>
       <p:ext uri="{BB962C8B-B14F-4D97-AF65-F5344CB8AC3E}">
-        <p14:creationId xmlns:p14="http://schemas.microsoft.com/office/powerpoint/2010/main" val="1238690865"/>
+        <p14:creationId xmlns:p14="http://schemas.microsoft.com/office/powerpoint/2010/main" val="1784530740"/>
       </p:ext>
     </p:extLst>
   </p:cSld>
@@ -4499,10 +4578,10 @@
       </p:grpSpPr>
       <p:sp>
         <p:nvSpPr>
-          <p:cNvPr id="2" name="Rectángulo 1">
+          <p:cNvPr id="29" name="Rectángulo 28">
             <a:extLst>
               <a:ext uri="{FF2B5EF4-FFF2-40B4-BE49-F238E27FC236}">
-                <a16:creationId xmlns:a16="http://schemas.microsoft.com/office/drawing/2014/main" id="{987989FF-95DE-370C-6708-E0E57D38B3C1}"/>
+                <a16:creationId xmlns:a16="http://schemas.microsoft.com/office/drawing/2014/main" id="{F2FEB0CE-D207-2AD9-E87C-6E5DAD909032}"/>
               </a:ext>
             </a:extLst>
           </p:cNvPr>
@@ -4511,8 +4590,8 @@
         </p:nvSpPr>
         <p:spPr>
           <a:xfrm>
-            <a:off x="0" y="0"/>
-            <a:ext cx="3556989" cy="11858625"/>
+            <a:off x="-27428" y="0"/>
+            <a:ext cx="3477579" cy="11858625"/>
           </a:xfrm>
           <a:prstGeom prst="rect">
             <a:avLst/>
@@ -4570,7 +4649,7 @@
         </p:blipFill>
         <p:spPr>
           <a:xfrm>
-            <a:off x="0" y="0"/>
+            <a:off x="-25400" y="0"/>
             <a:ext cx="8851900" cy="10847100"/>
           </a:xfrm>
           <a:prstGeom prst="rect">
@@ -4661,6 +4740,46 @@
           </a:fontRef>
         </p:style>
       </p:cxnSp>
+      <p:sp>
+        <p:nvSpPr>
+          <p:cNvPr id="13" name="CuadroTexto 12">
+            <a:extLst>
+              <a:ext uri="{FF2B5EF4-FFF2-40B4-BE49-F238E27FC236}">
+                <a16:creationId xmlns:a16="http://schemas.microsoft.com/office/drawing/2014/main" id="{FAC4F03D-3D79-B951-9C58-BB8651AE4F19}"/>
+              </a:ext>
+            </a:extLst>
+          </p:cNvPr>
+          <p:cNvSpPr txBox="1"/>
+          <p:nvPr/>
+        </p:nvSpPr>
+        <p:spPr>
+          <a:xfrm>
+            <a:off x="295703" y="4797082"/>
+            <a:ext cx="3169190" cy="513089"/>
+          </a:xfrm>
+          <a:prstGeom prst="rect">
+            <a:avLst/>
+          </a:prstGeom>
+          <a:noFill/>
+        </p:spPr>
+        <p:txBody>
+          <a:bodyPr wrap="square" rtlCol="0">
+            <a:spAutoFit/>
+          </a:bodyPr>
+          <a:lstStyle/>
+          <a:p>
+            <a:r>
+              <a:rPr lang="es-CL" sz="1367" b="1" dirty="0">
+                <a:solidFill>
+                  <a:schemeClr val="bg1"/>
+                </a:solidFill>
+                <a:latin typeface="Be Vietnam Pro SemiBold" pitchFamily="2" charset="77"/>
+              </a:rPr>
+              <a:t>Composición General por Instrumentos Financieros</a:t>
+            </a:r>
+          </a:p>
+        </p:txBody>
+      </p:sp>
       <p:sp>
         <p:nvSpPr>
           <p:cNvPr id="16" name="CuadroTexto 15">
@@ -4867,6 +4986,257 @@
       </p:sp>
       <p:sp>
         <p:nvSpPr>
+          <p:cNvPr id="23" name="CuadroTexto 22">
+            <a:extLst>
+              <a:ext uri="{FF2B5EF4-FFF2-40B4-BE49-F238E27FC236}">
+                <a16:creationId xmlns:a16="http://schemas.microsoft.com/office/drawing/2014/main" id="{C1282681-A294-7026-1D34-B26EF906E9CA}"/>
+              </a:ext>
+            </a:extLst>
+          </p:cNvPr>
+          <p:cNvSpPr txBox="1"/>
+          <p:nvPr/>
+        </p:nvSpPr>
+        <p:spPr>
+          <a:xfrm>
+            <a:off x="3864678" y="2369926"/>
+            <a:ext cx="4679532" cy="7017306"/>
+          </a:xfrm>
+          <a:prstGeom prst="rect">
+            <a:avLst/>
+          </a:prstGeom>
+          <a:noFill/>
+        </p:spPr>
+        <p:txBody>
+          <a:bodyPr wrap="square" rtlCol="0">
+            <a:spAutoFit/>
+          </a:bodyPr>
+          <a:lstStyle/>
+          <a:p>
+            <a:r>
+              <a:rPr lang="es-CL" sz="1000" spc="-34" dirty="0">
+                <a:latin typeface="Be Vietnam Pro Medium" pitchFamily="2" charset="77"/>
+                <a:ea typeface="Calibri" panose="020F0502020204030204" pitchFamily="34" charset="0"/>
+              </a:rPr>
+              <a:t>Riesgo de Mercado</a:t>
+            </a:r>
+          </a:p>
+          <a:p>
+            <a:r>
+              <a:rPr lang="es-CL" sz="1000" spc="-34" dirty="0">
+                <a:latin typeface="Be Vietnam Pro ExtraLight" pitchFamily="2" charset="77"/>
+                <a:ea typeface="Calibri" panose="020F0502020204030204" pitchFamily="34" charset="0"/>
+              </a:rPr>
+              <a:t>Este es el riesgo de una variación adversa en el precio o tasa de mercado en los instrumentos en que invierte el Fondo</a:t>
+            </a:r>
+          </a:p>
+          <a:p>
+            <a:endParaRPr lang="es-CL" sz="1000" spc="-34" dirty="0">
+              <a:latin typeface="Be Vietnam Pro ExtraLight" pitchFamily="2" charset="77"/>
+              <a:ea typeface="Calibri" panose="020F0502020204030204" pitchFamily="34" charset="0"/>
+            </a:endParaRPr>
+          </a:p>
+          <a:p>
+            <a:r>
+              <a:rPr lang="es-CL" sz="1000" spc="-34" dirty="0">
+                <a:latin typeface="Be Vietnam Pro Medium" pitchFamily="2" charset="77"/>
+                <a:ea typeface="Calibri" panose="020F0502020204030204" pitchFamily="34" charset="0"/>
+              </a:rPr>
+              <a:t>Riesgo de Crédito</a:t>
+            </a:r>
+          </a:p>
+          <a:p>
+            <a:r>
+              <a:rPr lang="es-CL" sz="1000" spc="-34" dirty="0">
+                <a:latin typeface="Be Vietnam Pro ExtraLight" pitchFamily="2" charset="77"/>
+                <a:ea typeface="Calibri" panose="020F0502020204030204" pitchFamily="34" charset="0"/>
+              </a:rPr>
+              <a:t>Es la posible pérdida que se asume como consecuencia del incumplimiento de las obligaciones directas, indirectas o de derivados que conllevan al no pago parcial, total o falta de oportunidad del pago de los emisores de los instrumentos en que invierte el Fondo y que pudieran ocasionar una pérdida financiera.</a:t>
+            </a:r>
+          </a:p>
+          <a:p>
+            <a:endParaRPr lang="es-CL" sz="1000" spc="-34" dirty="0">
+              <a:latin typeface="Be Vietnam Pro ExtraLight" pitchFamily="2" charset="77"/>
+              <a:ea typeface="Calibri" panose="020F0502020204030204" pitchFamily="34" charset="0"/>
+            </a:endParaRPr>
+          </a:p>
+          <a:p>
+            <a:r>
+              <a:rPr lang="es-CL" sz="1000" spc="-34" dirty="0">
+                <a:latin typeface="Be Vietnam Pro Medium" pitchFamily="2" charset="77"/>
+                <a:ea typeface="Calibri" panose="020F0502020204030204" pitchFamily="34" charset="0"/>
+              </a:rPr>
+              <a:t>Riesgo de Liquidez</a:t>
+            </a:r>
+          </a:p>
+          <a:p>
+            <a:r>
+              <a:rPr lang="es-CL" sz="1000" spc="-34" dirty="0">
+                <a:latin typeface="Be Vietnam Pro ExtraLight" pitchFamily="2" charset="77"/>
+                <a:ea typeface="Calibri" panose="020F0502020204030204" pitchFamily="34" charset="0"/>
+              </a:rPr>
+              <a:t>Riesgo asociado a la capacidad de generación de recursos del Fondo para cumplir con sus obligaciones de rescate o vencimiento del mismo.</a:t>
+            </a:r>
+          </a:p>
+          <a:p>
+            <a:endParaRPr lang="es-CL" sz="1000" spc="-34" dirty="0">
+              <a:latin typeface="Be Vietnam Pro ExtraLight" pitchFamily="2" charset="77"/>
+              <a:ea typeface="Calibri" panose="020F0502020204030204" pitchFamily="34" charset="0"/>
+            </a:endParaRPr>
+          </a:p>
+          <a:p>
+            <a:r>
+              <a:rPr lang="es-CL" sz="1000" spc="-34" dirty="0">
+                <a:latin typeface="Be Vietnam Pro Medium" pitchFamily="2" charset="77"/>
+                <a:ea typeface="Calibri" panose="020F0502020204030204" pitchFamily="34" charset="0"/>
+              </a:rPr>
+              <a:t>Riesgo Profundidad de Mercado</a:t>
+            </a:r>
+          </a:p>
+          <a:p>
+            <a:r>
+              <a:rPr lang="es-CL" sz="1000" spc="-34" dirty="0">
+                <a:latin typeface="Be Vietnam Pro ExtraLight" pitchFamily="2" charset="77"/>
+                <a:ea typeface="Calibri" panose="020F0502020204030204" pitchFamily="34" charset="0"/>
+              </a:rPr>
+              <a:t>Corresponde a la posibilidad de comprar o vender un activo financiero al valor de mercado en un período de tiempo acorde a las características del instrumento.  Períodos de alta volatilidad de mercado afectan negativamente estos tiempos.</a:t>
+            </a:r>
+          </a:p>
+          <a:p>
+            <a:endParaRPr lang="es-CL" sz="1000" spc="-34" dirty="0">
+              <a:latin typeface="Be Vietnam Pro ExtraLight" pitchFamily="2" charset="77"/>
+              <a:ea typeface="Calibri" panose="020F0502020204030204" pitchFamily="34" charset="0"/>
+            </a:endParaRPr>
+          </a:p>
+          <a:p>
+            <a:r>
+              <a:rPr lang="es-CL" sz="1000" spc="-34" dirty="0">
+                <a:latin typeface="Be Vietnam Pro Medium" pitchFamily="2" charset="77"/>
+                <a:ea typeface="Calibri" panose="020F0502020204030204" pitchFamily="34" charset="0"/>
+              </a:rPr>
+              <a:t>Riesgo de Tasa de interés</a:t>
+            </a:r>
+          </a:p>
+          <a:p>
+            <a:r>
+              <a:rPr lang="es-CL" sz="1000" spc="-34" dirty="0">
+                <a:latin typeface="Be Vietnam Pro ExtraLight" pitchFamily="2" charset="77"/>
+                <a:ea typeface="Calibri" panose="020F0502020204030204" pitchFamily="34" charset="0"/>
+              </a:rPr>
+              <a:t>Exposición a pérdidas ocasionadas por cambios adversos en las tasas de interés de mercado y que afecten el valor de los instrumentos, contratos y demás operaciones registradas en el balance. </a:t>
+            </a:r>
+          </a:p>
+          <a:p>
+            <a:endParaRPr lang="es-CL" sz="1000" spc="-34" dirty="0">
+              <a:latin typeface="Be Vietnam Pro ExtraLight" pitchFamily="2" charset="77"/>
+              <a:ea typeface="Calibri" panose="020F0502020204030204" pitchFamily="34" charset="0"/>
+            </a:endParaRPr>
+          </a:p>
+          <a:p>
+            <a:r>
+              <a:rPr lang="es-CL" sz="1000" spc="-34" dirty="0">
+                <a:latin typeface="Be Vietnam Pro Medium" pitchFamily="2" charset="77"/>
+                <a:ea typeface="Calibri" panose="020F0502020204030204" pitchFamily="34" charset="0"/>
+              </a:rPr>
+              <a:t>Riesgo de Moneda</a:t>
+            </a:r>
+          </a:p>
+          <a:p>
+            <a:r>
+              <a:rPr lang="es-CL" sz="1000" spc="-34" dirty="0">
+                <a:latin typeface="Be Vietnam Pro ExtraLight" pitchFamily="2" charset="77"/>
+                <a:ea typeface="Calibri" panose="020F0502020204030204" pitchFamily="34" charset="0"/>
+              </a:rPr>
+              <a:t>Es la exposición a pérdidas ocasionadas por cambios adversos en el valor en moneda nacional de las monedas extranjeras que están expresados a los instrumentos, contratos y demás operaciones del balance del Fondo.</a:t>
+            </a:r>
+          </a:p>
+          <a:p>
+            <a:endParaRPr lang="es-CL" sz="1000" spc="-34" dirty="0">
+              <a:latin typeface="Be Vietnam Pro ExtraLight" pitchFamily="2" charset="77"/>
+              <a:ea typeface="Calibri" panose="020F0502020204030204" pitchFamily="34" charset="0"/>
+            </a:endParaRPr>
+          </a:p>
+          <a:p>
+            <a:r>
+              <a:rPr lang="es-CL" sz="1000" spc="-34" dirty="0">
+                <a:latin typeface="Be Vietnam Pro Medium" pitchFamily="2" charset="77"/>
+                <a:ea typeface="Calibri" panose="020F0502020204030204" pitchFamily="34" charset="0"/>
+              </a:rPr>
+              <a:t>Riesgo Sectorial</a:t>
+            </a:r>
+          </a:p>
+          <a:p>
+            <a:r>
+              <a:rPr lang="es-CL" sz="1000" spc="-34" dirty="0">
+                <a:latin typeface="Be Vietnam Pro ExtraLight" pitchFamily="2" charset="77"/>
+                <a:ea typeface="Calibri" panose="020F0502020204030204" pitchFamily="34" charset="0"/>
+              </a:rPr>
+              <a:t>Este riesgo está asociado a condiciones de mercado adversas que pueden afectar a un sector industrial en particular y por ende la rentabilidad del Fondo. </a:t>
+            </a:r>
+          </a:p>
+          <a:p>
+            <a:endParaRPr lang="es-CL" sz="1000" spc="-34" dirty="0">
+              <a:latin typeface="Be Vietnam Pro ExtraLight" pitchFamily="2" charset="77"/>
+              <a:ea typeface="Calibri" panose="020F0502020204030204" pitchFamily="34" charset="0"/>
+            </a:endParaRPr>
+          </a:p>
+          <a:p>
+            <a:r>
+              <a:rPr lang="es-CL" sz="1000" b="1" spc="-34" dirty="0">
+                <a:latin typeface="Be Vietnam Pro SemiBold" pitchFamily="2" charset="77"/>
+                <a:ea typeface="Calibri" panose="020F0502020204030204" pitchFamily="34" charset="0"/>
+              </a:rPr>
+              <a:t>Gastos del fondo</a:t>
+            </a:r>
+          </a:p>
+          <a:p>
+            <a:r>
+              <a:rPr lang="es-CL" sz="1000" spc="-34" dirty="0">
+                <a:latin typeface="Be Vietnam Pro ExtraLight" pitchFamily="2" charset="77"/>
+                <a:ea typeface="Calibri" panose="020F0502020204030204" pitchFamily="34" charset="0"/>
+              </a:rPr>
+              <a:t>Corresponden a los gastos directos e indirectos necesarios para el correcto funcionamiento del fondo los que están detallados en el Reglamento Interno</a:t>
+            </a:r>
+          </a:p>
+          <a:p>
+            <a:endParaRPr lang="es-CL" sz="1000" spc="-34" dirty="0">
+              <a:latin typeface="Be Vietnam Pro ExtraLight" pitchFamily="2" charset="77"/>
+              <a:ea typeface="Calibri" panose="020F0502020204030204" pitchFamily="34" charset="0"/>
+            </a:endParaRPr>
+          </a:p>
+          <a:p>
+            <a:r>
+              <a:rPr lang="es-CL" sz="1000" spc="-34" dirty="0">
+                <a:latin typeface="Be Vietnam Pro Medium" pitchFamily="2" charset="77"/>
+                <a:ea typeface="Calibri" panose="020F0502020204030204" pitchFamily="34" charset="0"/>
+              </a:rPr>
+              <a:t>Forma de Ingreso y Pago del Fondo</a:t>
+            </a:r>
+          </a:p>
+          <a:p>
+            <a:r>
+              <a:rPr lang="es-CL" sz="1000" spc="-34" dirty="0">
+                <a:latin typeface="Be Vietnam Pro ExtraLight" pitchFamily="2" charset="77"/>
+                <a:ea typeface="Calibri" panose="020F0502020204030204" pitchFamily="34" charset="0"/>
+              </a:rPr>
+              <a:t>La moneda en que el inversionista entra al fondo es aportando pesos chilenos, y al rescate de las cuotas, el fondo le entrega pesos chilenos.</a:t>
+            </a:r>
+          </a:p>
+          <a:p>
+            <a:endParaRPr lang="es-CL" sz="1000" spc="-34" dirty="0">
+              <a:latin typeface="Be Vietnam Pro ExtraLight" pitchFamily="2" charset="77"/>
+              <a:ea typeface="Calibri" panose="020F0502020204030204" pitchFamily="34" charset="0"/>
+            </a:endParaRPr>
+          </a:p>
+          <a:p>
+            <a:endParaRPr lang="es-CL" sz="1000" spc="-34" dirty="0">
+              <a:latin typeface="Be Vietnam Pro ExtraLight" pitchFamily="2" charset="77"/>
+              <a:ea typeface="Calibri" panose="020F0502020204030204" pitchFamily="34" charset="0"/>
+            </a:endParaRPr>
+          </a:p>
+        </p:txBody>
+      </p:sp>
+      <p:sp>
+        <p:nvSpPr>
           <p:cNvPr id="24" name="CuadroTexto 23">
             <a:extLst>
               <a:ext uri="{FF2B5EF4-FFF2-40B4-BE49-F238E27FC236}">
@@ -4959,7 +5329,7 @@
         </p:nvCxnSpPr>
         <p:spPr>
           <a:xfrm>
-            <a:off x="4011882" y="9260156"/>
+            <a:off x="3995808" y="9387232"/>
             <a:ext cx="4430369" cy="0"/>
           </a:xfrm>
           <a:prstGeom prst="line">
@@ -5033,303 +5403,75 @@
           </a:fontRef>
         </p:style>
       </p:cxnSp>
-      <p:sp>
-        <p:nvSpPr>
-          <p:cNvPr id="4" name="CuadroTexto 3">
+      <p:graphicFrame>
+        <p:nvGraphicFramePr>
+          <p:cNvPr id="5" name="Objeto 4">
             <a:extLst>
               <a:ext uri="{FF2B5EF4-FFF2-40B4-BE49-F238E27FC236}">
-                <a16:creationId xmlns:a16="http://schemas.microsoft.com/office/drawing/2014/main" id="{06C2D48D-2489-D275-9784-CE29DD8A026C}"/>
+                <a16:creationId xmlns:a16="http://schemas.microsoft.com/office/drawing/2014/main" id="{C3E9B422-9B9B-B42E-196E-69A4CE94E254}"/>
               </a:ext>
             </a:extLst>
           </p:cNvPr>
-          <p:cNvSpPr txBox="1"/>
-          <p:nvPr/>
-        </p:nvSpPr>
-        <p:spPr>
-          <a:xfrm>
-            <a:off x="3864678" y="2369926"/>
-            <a:ext cx="4679532" cy="7017306"/>
-          </a:xfrm>
-          <a:prstGeom prst="rect">
-            <a:avLst/>
-          </a:prstGeom>
-          <a:noFill/>
-        </p:spPr>
-        <p:txBody>
-          <a:bodyPr wrap="square" rtlCol="0">
-            <a:spAutoFit/>
-          </a:bodyPr>
-          <a:lstStyle/>
-          <a:p>
-            <a:r>
-              <a:rPr lang="es-CL" sz="1000" spc="-34" dirty="0">
-                <a:latin typeface="Be Vietnam Pro Medium" pitchFamily="2" charset="77"/>
-                <a:ea typeface="Calibri" panose="020F0502020204030204" pitchFamily="34" charset="0"/>
-              </a:rPr>
-              <a:t>Riesgo de Mercado</a:t>
-            </a:r>
-          </a:p>
-          <a:p>
-            <a:r>
-              <a:rPr lang="es-CL" sz="1000" spc="-34" dirty="0">
-                <a:latin typeface="Be Vietnam Pro ExtraLight" pitchFamily="2" charset="77"/>
-                <a:ea typeface="Calibri" panose="020F0502020204030204" pitchFamily="34" charset="0"/>
-              </a:rPr>
-              <a:t>Este es el riesgo de una variación adversa en el precio o tasa de mercado en los instrumentos en que invierte el Fondo</a:t>
-            </a:r>
-          </a:p>
-          <a:p>
-            <a:endParaRPr lang="es-CL" sz="1000" spc="-34" dirty="0">
-              <a:latin typeface="Be Vietnam Pro ExtraLight" pitchFamily="2" charset="77"/>
-              <a:ea typeface="Calibri" panose="020F0502020204030204" pitchFamily="34" charset="0"/>
-            </a:endParaRPr>
-          </a:p>
-          <a:p>
-            <a:r>
-              <a:rPr lang="es-CL" sz="1000" spc="-34" dirty="0">
-                <a:latin typeface="Be Vietnam Pro Medium" pitchFamily="2" charset="77"/>
-                <a:ea typeface="Calibri" panose="020F0502020204030204" pitchFamily="34" charset="0"/>
-              </a:rPr>
-              <a:t>Riesgo de Crédito</a:t>
-            </a:r>
-          </a:p>
-          <a:p>
-            <a:r>
-              <a:rPr lang="es-CL" sz="1000" spc="-34" dirty="0">
-                <a:latin typeface="Be Vietnam Pro ExtraLight" pitchFamily="2" charset="77"/>
-                <a:ea typeface="Calibri" panose="020F0502020204030204" pitchFamily="34" charset="0"/>
-              </a:rPr>
-              <a:t>Es la posible pérdida que se asume como consecuencia del incumplimiento de las obligaciones directas, indirectas o de derivados que conllevan al no pago parcial, total o falta de oportunidad del pago de los emisores de los instrumentos en que invierte el Fondo y que pudieran ocasionar una pérdida financiera.</a:t>
-            </a:r>
-          </a:p>
-          <a:p>
-            <a:endParaRPr lang="es-CL" sz="1000" spc="-34" dirty="0">
-              <a:latin typeface="Be Vietnam Pro ExtraLight" pitchFamily="2" charset="77"/>
-              <a:ea typeface="Calibri" panose="020F0502020204030204" pitchFamily="34" charset="0"/>
-            </a:endParaRPr>
-          </a:p>
-          <a:p>
-            <a:r>
-              <a:rPr lang="es-CL" sz="1000" spc="-34" dirty="0">
-                <a:latin typeface="Be Vietnam Pro Medium" pitchFamily="2" charset="77"/>
-                <a:ea typeface="Calibri" panose="020F0502020204030204" pitchFamily="34" charset="0"/>
-              </a:rPr>
-              <a:t>Riesgo de Liquidez</a:t>
-            </a:r>
-          </a:p>
-          <a:p>
-            <a:r>
-              <a:rPr lang="es-CL" sz="1000" spc="-34" dirty="0">
-                <a:latin typeface="Be Vietnam Pro ExtraLight" pitchFamily="2" charset="77"/>
-                <a:ea typeface="Calibri" panose="020F0502020204030204" pitchFamily="34" charset="0"/>
-              </a:rPr>
-              <a:t>Riesgo asociado a la capacidad de generación de recursos del Fondo para cumplir con sus obligaciones de rescate o vencimiento del mismo.</a:t>
-            </a:r>
-          </a:p>
-          <a:p>
-            <a:endParaRPr lang="es-CL" sz="1000" spc="-34" dirty="0">
-              <a:latin typeface="Be Vietnam Pro ExtraLight" pitchFamily="2" charset="77"/>
-              <a:ea typeface="Calibri" panose="020F0502020204030204" pitchFamily="34" charset="0"/>
-            </a:endParaRPr>
-          </a:p>
-          <a:p>
-            <a:r>
-              <a:rPr lang="es-CL" sz="1000" spc="-34" dirty="0">
-                <a:latin typeface="Be Vietnam Pro Medium" pitchFamily="2" charset="77"/>
-                <a:ea typeface="Calibri" panose="020F0502020204030204" pitchFamily="34" charset="0"/>
-              </a:rPr>
-              <a:t>Riesgo Profundidad de Mercado</a:t>
-            </a:r>
-          </a:p>
-          <a:p>
-            <a:r>
-              <a:rPr lang="es-CL" sz="1000" spc="-34" dirty="0">
-                <a:latin typeface="Be Vietnam Pro ExtraLight" pitchFamily="2" charset="77"/>
-                <a:ea typeface="Calibri" panose="020F0502020204030204" pitchFamily="34" charset="0"/>
-              </a:rPr>
-              <a:t>Corresponde a la posibilidad de comprar o vender un activo financiero al valor de mercado en un período de tiempo acorde a las características del instrumento.  Períodos de alta volatilidad de mercado afectan negativamente estos tiempos.</a:t>
-            </a:r>
-          </a:p>
-          <a:p>
-            <a:endParaRPr lang="es-CL" sz="1000" spc="-34" dirty="0">
-              <a:latin typeface="Be Vietnam Pro ExtraLight" pitchFamily="2" charset="77"/>
-              <a:ea typeface="Calibri" panose="020F0502020204030204" pitchFamily="34" charset="0"/>
-            </a:endParaRPr>
-          </a:p>
-          <a:p>
-            <a:r>
-              <a:rPr lang="es-CL" sz="1000" spc="-34" dirty="0">
-                <a:latin typeface="Be Vietnam Pro Medium" pitchFamily="2" charset="77"/>
-                <a:ea typeface="Calibri" panose="020F0502020204030204" pitchFamily="34" charset="0"/>
-              </a:rPr>
-              <a:t>Riesgo de Tasa de interés</a:t>
-            </a:r>
-          </a:p>
-          <a:p>
-            <a:r>
-              <a:rPr lang="es-CL" sz="1000" spc="-34" dirty="0">
-                <a:latin typeface="Be Vietnam Pro ExtraLight" pitchFamily="2" charset="77"/>
-                <a:ea typeface="Calibri" panose="020F0502020204030204" pitchFamily="34" charset="0"/>
-              </a:rPr>
-              <a:t>Exposición a pérdidas ocasionadas por cambios adversos en las tasas de interés de mercado y que afecten el valor de los instrumentos, contratos y demás operaciones registradas en el balance. </a:t>
-            </a:r>
-          </a:p>
-          <a:p>
-            <a:endParaRPr lang="es-CL" sz="1000" spc="-34" dirty="0">
-              <a:latin typeface="Be Vietnam Pro ExtraLight" pitchFamily="2" charset="77"/>
-              <a:ea typeface="Calibri" panose="020F0502020204030204" pitchFamily="34" charset="0"/>
-            </a:endParaRPr>
-          </a:p>
-          <a:p>
-            <a:r>
-              <a:rPr lang="es-CL" sz="1000" spc="-34" dirty="0">
-                <a:latin typeface="Be Vietnam Pro Medium" pitchFamily="2" charset="77"/>
-                <a:ea typeface="Calibri" panose="020F0502020204030204" pitchFamily="34" charset="0"/>
-              </a:rPr>
-              <a:t>Riesgo de Moneda</a:t>
-            </a:r>
-          </a:p>
-          <a:p>
-            <a:r>
-              <a:rPr lang="es-CL" sz="1000" spc="-34" dirty="0">
-                <a:latin typeface="Be Vietnam Pro ExtraLight" pitchFamily="2" charset="77"/>
-                <a:ea typeface="Calibri" panose="020F0502020204030204" pitchFamily="34" charset="0"/>
-              </a:rPr>
-              <a:t>Es la exposición a pérdidas ocasionadas por cambios adversos en el valor en moneda nacional de las monedas extranjeras que están expresados a los instrumentos, contratos y demás operaciones del balance del Fondo.</a:t>
-            </a:r>
-          </a:p>
-          <a:p>
-            <a:endParaRPr lang="es-CL" sz="1000" spc="-34" dirty="0">
-              <a:latin typeface="Be Vietnam Pro ExtraLight" pitchFamily="2" charset="77"/>
-              <a:ea typeface="Calibri" panose="020F0502020204030204" pitchFamily="34" charset="0"/>
-            </a:endParaRPr>
-          </a:p>
-          <a:p>
-            <a:r>
-              <a:rPr lang="es-CL" sz="1000" spc="-34" dirty="0">
-                <a:latin typeface="Be Vietnam Pro Medium" pitchFamily="2" charset="77"/>
-                <a:ea typeface="Calibri" panose="020F0502020204030204" pitchFamily="34" charset="0"/>
-              </a:rPr>
-              <a:t>Riesgo Sectorial</a:t>
-            </a:r>
-          </a:p>
-          <a:p>
-            <a:r>
-              <a:rPr lang="es-CL" sz="1000" spc="-34" dirty="0">
-                <a:latin typeface="Be Vietnam Pro ExtraLight" pitchFamily="2" charset="77"/>
-                <a:ea typeface="Calibri" panose="020F0502020204030204" pitchFamily="34" charset="0"/>
-              </a:rPr>
-              <a:t>Este riesgo está asociado a condiciones de mercado adversas que pueden afectar a un sector industrial en particular y por ende la rentabilidad del Fondo. </a:t>
-            </a:r>
-          </a:p>
-          <a:p>
-            <a:endParaRPr lang="es-CL" sz="1000" spc="-34" dirty="0">
-              <a:latin typeface="Be Vietnam Pro ExtraLight" pitchFamily="2" charset="77"/>
-              <a:ea typeface="Calibri" panose="020F0502020204030204" pitchFamily="34" charset="0"/>
-            </a:endParaRPr>
-          </a:p>
-          <a:p>
-            <a:r>
-              <a:rPr lang="es-CL" sz="1000" b="1" spc="-34" dirty="0">
-                <a:latin typeface="Be Vietnam Pro SemiBold" pitchFamily="2" charset="77"/>
-                <a:ea typeface="Calibri" panose="020F0502020204030204" pitchFamily="34" charset="0"/>
-              </a:rPr>
-              <a:t>Gastos del fondo</a:t>
-            </a:r>
-          </a:p>
-          <a:p>
-            <a:r>
-              <a:rPr lang="es-CL" sz="1000" spc="-34" dirty="0">
-                <a:latin typeface="Be Vietnam Pro ExtraLight" pitchFamily="2" charset="77"/>
-                <a:ea typeface="Calibri" panose="020F0502020204030204" pitchFamily="34" charset="0"/>
-              </a:rPr>
-              <a:t>Corresponden a los gastos directos e indirectos necesarios para el correcto funcionamiento del fondo los que están detallados en el Reglamento Interno</a:t>
-            </a:r>
-          </a:p>
-          <a:p>
-            <a:endParaRPr lang="es-CL" sz="1000" spc="-34" dirty="0">
-              <a:latin typeface="Be Vietnam Pro ExtraLight" pitchFamily="2" charset="77"/>
-              <a:ea typeface="Calibri" panose="020F0502020204030204" pitchFamily="34" charset="0"/>
-            </a:endParaRPr>
-          </a:p>
-          <a:p>
-            <a:r>
-              <a:rPr lang="es-CL" sz="1000" spc="-34" dirty="0">
-                <a:latin typeface="Be Vietnam Pro Medium" pitchFamily="2" charset="77"/>
-                <a:ea typeface="Calibri" panose="020F0502020204030204" pitchFamily="34" charset="0"/>
-              </a:rPr>
-              <a:t>Forma de Ingreso y Pago del Fondo</a:t>
-            </a:r>
-          </a:p>
-          <a:p>
-            <a:r>
-              <a:rPr lang="es-CL" sz="1000" spc="-34" dirty="0">
-                <a:latin typeface="Be Vietnam Pro ExtraLight" pitchFamily="2" charset="77"/>
-                <a:ea typeface="Calibri" panose="020F0502020204030204" pitchFamily="34" charset="0"/>
-              </a:rPr>
-              <a:t>La moneda en que el inversionista entra al fondo es aportando pesos chilenos, y al rescate de las cuotas, el fondo le entrega pesos chilenos.</a:t>
-            </a:r>
-          </a:p>
-          <a:p>
-            <a:endParaRPr lang="es-CL" sz="1000" spc="-34" dirty="0">
-              <a:latin typeface="Be Vietnam Pro ExtraLight" pitchFamily="2" charset="77"/>
-              <a:ea typeface="Calibri" panose="020F0502020204030204" pitchFamily="34" charset="0"/>
-            </a:endParaRPr>
-          </a:p>
-          <a:p>
-            <a:endParaRPr lang="es-CL" sz="1000" spc="-34" dirty="0">
-              <a:latin typeface="Be Vietnam Pro ExtraLight" pitchFamily="2" charset="77"/>
-              <a:ea typeface="Calibri" panose="020F0502020204030204" pitchFamily="34" charset="0"/>
-            </a:endParaRPr>
-          </a:p>
-        </p:txBody>
-      </p:sp>
-      <p:sp>
-        <p:nvSpPr>
-          <p:cNvPr id="7" name="CuadroTexto 6">
+          <p:cNvGraphicFramePr>
+            <a:graphicFrameLocks noChangeAspect="1"/>
+          </p:cNvGraphicFramePr>
+          <p:nvPr>
+            <p:extLst>
+              <p:ext uri="{D42A27DB-BD31-4B8C-83A1-F6EECF244321}">
+                <p14:modId xmlns:p14="http://schemas.microsoft.com/office/powerpoint/2010/main" val="3078932569"/>
+              </p:ext>
+            </p:extLst>
+          </p:nvPr>
+        </p:nvGraphicFramePr>
+        <p:xfrm>
+          <a:off x="381000" y="9101138"/>
+          <a:ext cx="2676525" cy="962025"/>
+        </p:xfrm>
+        <a:graphic>
+          <a:graphicData uri="http://schemas.openxmlformats.org/presentationml/2006/ole">
+            <mc:AlternateContent xmlns:mc="http://schemas.openxmlformats.org/markup-compatibility/2006">
+              <mc:Choice xmlns:v="urn:schemas-microsoft-com:vml" Requires="v">
+                <p:oleObj name="Worksheet" r:id="rId3" imgW="2676363" imgH="961911" progId="Excel.Sheet.12">
+                  <p:link updateAutomatic="1"/>
+                </p:oleObj>
+              </mc:Choice>
+              <mc:Fallback>
+                <p:oleObj name="Worksheet" r:id="rId3" imgW="2676363" imgH="961911" progId="Excel.Sheet.12">
+                  <p:link updateAutomatic="1"/>
+                  <p:pic>
+                    <p:nvPicPr>
+                      <p:cNvPr id="0" name=""/>
+                      <p:cNvPicPr/>
+                      <p:nvPr/>
+                    </p:nvPicPr>
+                    <p:blipFill>
+                      <a:blip r:embed="rId4"/>
+                      <a:stretch>
+                        <a:fillRect/>
+                      </a:stretch>
+                    </p:blipFill>
+                    <p:spPr>
+                      <a:xfrm>
+                        <a:off x="381000" y="9101138"/>
+                        <a:ext cx="2676525" cy="962025"/>
+                      </a:xfrm>
+                      <a:prstGeom prst="rect">
+                        <a:avLst/>
+                      </a:prstGeom>
+                    </p:spPr>
+                  </p:pic>
+                </p:oleObj>
+              </mc:Fallback>
+            </mc:AlternateContent>
+          </a:graphicData>
+        </a:graphic>
+      </p:graphicFrame>
+      <p:graphicFrame>
+        <p:nvGraphicFramePr>
+          <p:cNvPr id="6" name="Tabla 5">
             <a:extLst>
               <a:ext uri="{FF2B5EF4-FFF2-40B4-BE49-F238E27FC236}">
-                <a16:creationId xmlns:a16="http://schemas.microsoft.com/office/drawing/2014/main" id="{C946A273-EF11-2491-5ADD-E14754141DC0}"/>
-              </a:ext>
-            </a:extLst>
-          </p:cNvPr>
-          <p:cNvSpPr txBox="1"/>
-          <p:nvPr/>
-        </p:nvSpPr>
-        <p:spPr>
-          <a:xfrm>
-            <a:off x="295703" y="4797082"/>
-            <a:ext cx="3169190" cy="513089"/>
-          </a:xfrm>
-          <a:prstGeom prst="rect">
-            <a:avLst/>
-          </a:prstGeom>
-          <a:noFill/>
-        </p:spPr>
-        <p:txBody>
-          <a:bodyPr wrap="square" rtlCol="0">
-            <a:spAutoFit/>
-          </a:bodyPr>
-          <a:lstStyle/>
-          <a:p>
-            <a:r>
-              <a:rPr lang="es-CL" sz="1367" b="1" dirty="0">
-                <a:solidFill>
-                  <a:schemeClr val="bg1"/>
-                </a:solidFill>
-                <a:latin typeface="Be Vietnam Pro SemiBold" pitchFamily="2" charset="77"/>
-              </a:rPr>
-              <a:t>Composición General por Instrumentos Financieros</a:t>
-            </a:r>
-          </a:p>
-        </p:txBody>
-      </p:sp>
-      <p:graphicFrame>
-        <p:nvGraphicFramePr>
-          <p:cNvPr id="10" name="Tabla 9">
-            <a:extLst>
-              <a:ext uri="{FF2B5EF4-FFF2-40B4-BE49-F238E27FC236}">
-                <a16:creationId xmlns:a16="http://schemas.microsoft.com/office/drawing/2014/main" id="{83C58005-F58A-4ED6-FF5C-69A441E6CC12}"/>
+                <a16:creationId xmlns:a16="http://schemas.microsoft.com/office/drawing/2014/main" id="{9B01BAA7-CC43-390A-9FF2-D25F67528C84}"/>
               </a:ext>
             </a:extLst>
           </p:cNvPr>
@@ -5339,13 +5481,13 @@
           <p:nvPr>
             <p:extLst>
               <p:ext uri="{D42A27DB-BD31-4B8C-83A1-F6EECF244321}">
-                <p14:modId xmlns:p14="http://schemas.microsoft.com/office/powerpoint/2010/main" val="3525660105"/>
+                <p14:modId xmlns:p14="http://schemas.microsoft.com/office/powerpoint/2010/main" val="2478746644"/>
               </p:ext>
             </p:extLst>
           </p:nvPr>
         </p:nvGraphicFramePr>
         <p:xfrm>
-          <a:off x="309631" y="5556652"/>
+          <a:off x="370591" y="5556652"/>
           <a:ext cx="2759448" cy="2049807"/>
         </p:xfrm>
         <a:graphic>
@@ -6669,10 +6811,10 @@
       </p:graphicFrame>
       <p:graphicFrame>
         <p:nvGraphicFramePr>
-          <p:cNvPr id="6" name="Objeto 5">
+          <p:cNvPr id="4" name="Objeto 3">
             <a:extLst>
               <a:ext uri="{FF2B5EF4-FFF2-40B4-BE49-F238E27FC236}">
-                <a16:creationId xmlns:a16="http://schemas.microsoft.com/office/drawing/2014/main" id="{0955B0C2-6818-6CFE-4A8D-2DC4C22C1F77}"/>
+                <a16:creationId xmlns:a16="http://schemas.microsoft.com/office/drawing/2014/main" id="{AC8EB108-8432-C777-A749-33D46A40FBD4}"/>
               </a:ext>
             </a:extLst>
           </p:cNvPr>
@@ -6682,104 +6824,29 @@
           <p:nvPr>
             <p:extLst>
               <p:ext uri="{D42A27DB-BD31-4B8C-83A1-F6EECF244321}">
-                <p14:modId xmlns:p14="http://schemas.microsoft.com/office/powerpoint/2010/main" val="3114399986"/>
+                <p14:modId xmlns:p14="http://schemas.microsoft.com/office/powerpoint/2010/main" val="3164749712"/>
               </p:ext>
             </p:extLst>
           </p:nvPr>
         </p:nvGraphicFramePr>
         <p:xfrm>
-          <a:off x="341313" y="3486150"/>
-          <a:ext cx="2497137" cy="361950"/>
+          <a:off x="254000" y="3390900"/>
+          <a:ext cx="2798763" cy="390525"/>
         </p:xfrm>
         <a:graphic>
           <a:graphicData uri="http://schemas.openxmlformats.org/presentationml/2006/ole">
             <mc:AlternateContent xmlns:mc="http://schemas.openxmlformats.org/markup-compatibility/2006">
               <mc:Choice xmlns:v="urn:schemas-microsoft-com:vml" Requires="v">
-                <p:oleObj name="Worksheet" r:id="rId3" imgW="2686197" imgH="390647" progId="Excel.Sheet.12">
+                <p:oleObj name="Worksheet" r:id="rId5" imgW="3009963" imgH="390647" progId="Excel.Sheet.12">
                   <p:link updateAutomatic="1"/>
                 </p:oleObj>
               </mc:Choice>
               <mc:Fallback>
-                <p:oleObj name="Worksheet" r:id="rId3" imgW="2686197" imgH="390647" progId="Excel.Sheet.12">
+                <p:oleObj name="Worksheet" r:id="rId5" imgW="3009963" imgH="390647" progId="Excel.Sheet.12">
                   <p:link updateAutomatic="1"/>
                   <p:pic>
                     <p:nvPicPr>
-                      <p:cNvPr id="6" name="Objeto 5">
-                        <a:extLst>
-                          <a:ext uri="{FF2B5EF4-FFF2-40B4-BE49-F238E27FC236}">
-                            <a16:creationId xmlns:a16="http://schemas.microsoft.com/office/drawing/2014/main" id="{0955B0C2-6818-6CFE-4A8D-2DC4C22C1F77}"/>
-                          </a:ext>
-                        </a:extLst>
-                      </p:cNvPr>
-                      <p:cNvPicPr/>
-                      <p:nvPr/>
-                    </p:nvPicPr>
-                    <p:blipFill>
-                      <a:blip r:embed="rId4"/>
-                      <a:stretch>
-                        <a:fillRect/>
-                      </a:stretch>
-                    </p:blipFill>
-                    <p:spPr>
-                      <a:xfrm>
-                        <a:off x="341313" y="3486150"/>
-                        <a:ext cx="2497137" cy="361950"/>
-                      </a:xfrm>
-                      <a:prstGeom prst="rect">
-                        <a:avLst/>
-                      </a:prstGeom>
-                    </p:spPr>
-                  </p:pic>
-                </p:oleObj>
-              </mc:Fallback>
-            </mc:AlternateContent>
-          </a:graphicData>
-        </a:graphic>
-      </p:graphicFrame>
-      <p:graphicFrame>
-        <p:nvGraphicFramePr>
-          <p:cNvPr id="8" name="Objeto 7">
-            <a:extLst>
-              <a:ext uri="{FF2B5EF4-FFF2-40B4-BE49-F238E27FC236}">
-                <a16:creationId xmlns:a16="http://schemas.microsoft.com/office/drawing/2014/main" id="{79614184-16AF-775E-F929-95C421554D04}"/>
-              </a:ext>
-            </a:extLst>
-          </p:cNvPr>
-          <p:cNvGraphicFramePr>
-            <a:graphicFrameLocks noChangeAspect="1"/>
-          </p:cNvGraphicFramePr>
-          <p:nvPr>
-            <p:extLst>
-              <p:ext uri="{D42A27DB-BD31-4B8C-83A1-F6EECF244321}">
-                <p14:modId xmlns:p14="http://schemas.microsoft.com/office/powerpoint/2010/main" val="1226099227"/>
-              </p:ext>
-            </p:extLst>
-          </p:nvPr>
-        </p:nvGraphicFramePr>
-        <p:xfrm>
-          <a:off x="355855" y="9260156"/>
-          <a:ext cx="2667000" cy="771525"/>
-        </p:xfrm>
-        <a:graphic>
-          <a:graphicData uri="http://schemas.openxmlformats.org/presentationml/2006/ole">
-            <mc:AlternateContent xmlns:mc="http://schemas.openxmlformats.org/markup-compatibility/2006">
-              <mc:Choice xmlns:v="urn:schemas-microsoft-com:vml" Requires="v">
-                <p:oleObj name="Worksheet" r:id="rId5" imgW="2666908" imgH="771697" progId="Excel.Sheet.12">
-                  <p:link updateAutomatic="1"/>
-                </p:oleObj>
-              </mc:Choice>
-              <mc:Fallback>
-                <p:oleObj name="Worksheet" r:id="rId5" imgW="2666908" imgH="771697" progId="Excel.Sheet.12">
-                  <p:link updateAutomatic="1"/>
-                  <p:pic>
-                    <p:nvPicPr>
-                      <p:cNvPr id="8" name="Objeto 7">
-                        <a:extLst>
-                          <a:ext uri="{FF2B5EF4-FFF2-40B4-BE49-F238E27FC236}">
-                            <a16:creationId xmlns:a16="http://schemas.microsoft.com/office/drawing/2014/main" id="{79614184-16AF-775E-F929-95C421554D04}"/>
-                          </a:ext>
-                        </a:extLst>
-                      </p:cNvPr>
+                      <p:cNvPr id="0" name=""/>
                       <p:cNvPicPr/>
                       <p:nvPr/>
                     </p:nvPicPr>
@@ -6791,8 +6858,8 @@
                     </p:blipFill>
                     <p:spPr>
                       <a:xfrm>
-                        <a:off x="355855" y="9260156"/>
-                        <a:ext cx="2667000" cy="771525"/>
+                        <a:off x="254000" y="3390900"/>
+                        <a:ext cx="2798763" cy="390525"/>
                       </a:xfrm>
                       <a:prstGeom prst="rect">
                         <a:avLst/>
